--- a/content/W04/D2/slides/C2_W04_D02_half1_STUDENT.pptx
+++ b/content/W04/D2/slides/C2_W04_D02_half1_STUDENT.pptx
@@ -1802,7 +1802,12 @@
           </a:p>
           <a:p>
             <a:r>
-              <a:t>tables in the facts file: the 1,020 are the 1,200 drivers less the idle tail.</a:t>
+              <a:t>tables in the facts file: the 880 are the 1,200 drivers less the 180 in the idle tail and the 140</a:t>
+            </a:r>
+          </a:p>
+          <a:p>
+            <a:r>
+              <a:t>joiners, and none of the joiners is in the tail.</a:t>
             </a:r>
           </a:p>
           <a:p>
@@ -7965,7 +7970,7 @@
                 </a:solidFill>
                 <a:latin typeface="Calibri"/>
               </a:rPr>
-              <a:t>- a) Peak online hours +24 percent and completed peak trips +3 percent</a:t>
+              <a:t>a) Peak online hours +24 percent and completed peak trips +3 percent</a:t>
             </a:r>
           </a:p>
           <a:p>
@@ -7981,7 +7986,7 @@
                 </a:solidFill>
                 <a:latin typeface="Calibri"/>
               </a:rPr>
-              <a:t>- b) Trips per peak online hour 1.90 to 1.58 and top-up to low acceptance 61 percent</a:t>
+              <a:t>b) Trips per peak online hour 1.90 to 1.58 and top-up to low acceptance 61 percent</a:t>
             </a:r>
           </a:p>
           <a:p>
@@ -7997,7 +8002,7 @@
                 </a:solidFill>
                 <a:latin typeface="Calibri"/>
               </a:rPr>
-              <a:t>- c) Median rider wait 4.8 to 4.6 minutes and new drivers since launch 140</a:t>
+              <a:t>c) Median rider wait 4.8 to 4.6 minutes and new drivers since launch 140</a:t>
             </a:r>
           </a:p>
           <a:p>
@@ -8013,7 +8018,7 @@
                 </a:solidFill>
                 <a:latin typeface="Calibri"/>
               </a:rPr>
-              <a:t>- d) Acceptance share 0.86 to 0.73 and top-up paid Rs 1.9 crore</a:t>
+              <a:t>d) Acceptance share 0.86 to 0.73 and top-up paid Rs 1.9 crore</a:t>
             </a:r>
           </a:p>
           <a:p>
@@ -9905,7 +9910,7 @@
                           </a:solidFill>
                           <a:latin typeface="Calibri"/>
                         </a:rPr>
-                        <a:t>2,51,910</a:t>
+                        <a:t>251,910</a:t>
                       </a:r>
                     </a:p>
                   </a:txBody>
@@ -9927,7 +9932,7 @@
                           </a:solidFill>
                           <a:latin typeface="Calibri"/>
                         </a:rPr>
-                        <a:t>2,56,556</a:t>
+                        <a:t>256,556</a:t>
                       </a:r>
                     </a:p>
                   </a:txBody>
@@ -10844,7 +10849,7 @@
                           </a:solidFill>
                           <a:latin typeface="Calibri"/>
                         </a:rPr>
-                        <a:t>2,69,773</a:t>
+                        <a:t>269,773</a:t>
                       </a:r>
                     </a:p>
                   </a:txBody>
@@ -10866,7 +10871,7 @@
                           </a:solidFill>
                           <a:latin typeface="Calibri"/>
                         </a:rPr>
-                        <a:t>3,47,583</a:t>
+                        <a:t>347,583</a:t>
                       </a:r>
                     </a:p>
                   </a:txBody>
@@ -14113,7 +14118,7 @@
                 </a:solidFill>
                 <a:latin typeface="Calibri"/>
               </a:rPr>
-              <a:t>- a) Per hour falls; per driver-week falls</a:t>
+              <a:t>a) Per hour falls; per driver-week falls</a:t>
             </a:r>
           </a:p>
           <a:p>
@@ -14129,7 +14134,7 @@
                 </a:solidFill>
                 <a:latin typeface="Calibri"/>
               </a:rPr>
-              <a:t>- b) Per hour falls; per driver-week rises a little</a:t>
+              <a:t>b) Per hour falls; per driver-week rises a little</a:t>
             </a:r>
           </a:p>
           <a:p>
@@ -14145,7 +14150,7 @@
                 </a:solidFill>
                 <a:latin typeface="Calibri"/>
               </a:rPr>
-              <a:t>- c) Per hour holds; per driver-week falls</a:t>
+              <a:t>c) Per hour holds; per driver-week falls</a:t>
             </a:r>
           </a:p>
           <a:p>
@@ -14161,7 +14166,7 @@
                 </a:solidFill>
                 <a:latin typeface="Calibri"/>
               </a:rPr>
-              <a:t>- d) Both hold nearly flat</a:t>
+              <a:t>d) Both hold nearly flat</a:t>
             </a:r>
           </a:p>
           <a:p>
@@ -17353,8 +17358,8 @@
         </p:nvSpPr>
         <p:spPr>
           <a:xfrm>
-            <a:off x="530352" y="1682496"/>
-            <a:ext cx="5291175" cy="1670304"/>
+            <a:off x="530352" y="1822450"/>
+            <a:ext cx="11130991" cy="841248"/>
           </a:xfrm>
           <a:prstGeom prst="rect">
             <a:avLst/>
@@ -17369,11 +17374,11 @@
           <a:p>
             <a:pPr>
               <a:spcAft>
-                <a:spcPts val="700"/>
+                <a:spcPts val="600"/>
               </a:spcAft>
             </a:pPr>
             <a:r>
-              <a:rPr sz="1400" b="1" i="0">
+              <a:rPr sz="1200" b="1" i="0">
                 <a:solidFill>
                   <a:srgbClr val="1A1440"/>
                 </a:solidFill>
@@ -17382,13 +17387,13 @@
               <a:t>Uber, Hyderabad, the driver app's peak-hour earnings guarantee, one day on.</a:t>
             </a:r>
             <a:r>
-              <a:rPr sz="1400" b="0" i="0">
+              <a:rPr sz="1200" b="0" i="0">
                 <a:solidFill>
                   <a:srgbClr val="1A1440"/>
                 </a:solidFill>
                 <a:latin typeface="Calibri"/>
               </a:rPr>
-              <a:t> The city head takes the redesign to Thursday's city review on one slide, in five minutes, with the driver-operations lead, the marketing lead and the finance partner in the room. Each loses something under the redesign and each will say so.</a:t>
+              <a:t> The city head takes the redesign to Thursday's city review on one slide, in five minutes. The driver-operations lead, the marketing lead and the finance partner each lose something under it, and each will say so.</a:t>
             </a:r>
           </a:p>
         </p:txBody>
@@ -17402,8 +17407,8 @@
           <p:nvPr/>
         </p:nvGraphicFramePr>
         <p:xfrm>
-          <a:off x="530352" y="3480816"/>
-          <a:ext cx="5291175" cy="2194560"/>
+          <a:off x="530352" y="2791714"/>
+          <a:ext cx="11130990" cy="1590040"/>
         </p:xfrm>
         <a:graphic>
           <a:graphicData uri="http://schemas.openxmlformats.org/drawingml/2006/table">
@@ -17412,25 +17417,24 @@
                 <a:tableStyleId>{2D5ABB26-0587-4C30-8999-92F81FD0307C}</a:tableStyleId>
               </a:tblPr>
               <a:tblGrid>
-                <a:gridCol w="1789522"/>
-                <a:gridCol w="1243836"/>
-                <a:gridCol w="1343417"/>
-                <a:gridCol w="914400"/>
+                <a:gridCol w="5062503"/>
+                <a:gridCol w="2649835"/>
+                <a:gridCol w="3418652"/>
               </a:tblGrid>
-              <a:tr h="438912">
+              <a:tr h="318008">
                 <a:tc>
                   <a:txBody>
                     <a:bodyPr/>
                     <a:lstStyle/>
                     <a:p>
                       <a:r>
-                        <a:rPr sz="950" b="1" i="0">
+                        <a:rPr sz="1150" b="1" i="0">
                           <a:solidFill>
                             <a:srgbClr val="FFFFFF"/>
                           </a:solidFill>
                           <a:latin typeface="Calibri"/>
                         </a:rPr>
-                        <a:t>The number the slide must explain</a:t>
+                        <a:t>Six weeks each side</a:t>
                       </a:r>
                     </a:p>
                   </a:txBody>
@@ -17446,13 +17450,13 @@
                     <a:lstStyle/>
                     <a:p>
                       <a:r>
-                        <a:rPr sz="950" b="1" i="0">
+                        <a:rPr sz="1150" b="1" i="0">
                           <a:solidFill>
                             <a:srgbClr val="FFFFFF"/>
                           </a:solidFill>
                           <a:latin typeface="Calibri"/>
                         </a:rPr>
-                        <a:t>Six weeks from 20 July</a:t>
+                        <a:t>20 Jul to 30 Aug</a:t>
                       </a:r>
                     </a:p>
                   </a:txBody>
@@ -17468,35 +17472,13 @@
                     <a:lstStyle/>
                     <a:p>
                       <a:r>
-                        <a:rPr sz="950" b="1" i="0">
+                        <a:rPr sz="1150" b="1" i="0">
                           <a:solidFill>
                             <a:srgbClr val="FFFFFF"/>
                           </a:solidFill>
                           <a:latin typeface="Calibri"/>
                         </a:rPr>
-                        <a:t>Six weeks from 31 August</a:t>
-                      </a:r>
-                    </a:p>
-                  </a:txBody>
-                  <a:tcPr marL="101600" marR="101600" marT="38100" marB="38100" anchor="ctr">
-                    <a:solidFill>
-                      <a:srgbClr val="1A0F5C"/>
-                    </a:solidFill>
-                  </a:tcPr>
-                </a:tc>
-                <a:tc>
-                  <a:txBody>
-                    <a:bodyPr/>
-                    <a:lstStyle/>
-                    <a:p>
-                      <a:r>
-                        <a:rPr sz="950" b="1" i="0">
-                          <a:solidFill>
-                            <a:srgbClr val="FFFFFF"/>
-                          </a:solidFill>
-                          <a:latin typeface="Calibri"/>
-                        </a:rPr>
-                        <a:t>Change</a:t>
+                        <a:t>31 Aug to 11 Oct</a:t>
                       </a:r>
                     </a:p>
                   </a:txBody>
@@ -17507,14 +17489,14 @@
                   </a:tcPr>
                 </a:tc>
               </a:tr>
-              <a:tr h="438912">
+              <a:tr h="318008">
                 <a:tc>
                   <a:txBody>
                     <a:bodyPr/>
                     <a:lstStyle/>
                     <a:p>
                       <a:r>
-                        <a:rPr sz="900" b="0" i="0">
+                        <a:rPr sz="1100" b="0" i="0">
                           <a:solidFill>
                             <a:srgbClr val="1A1440"/>
                           </a:solidFill>
@@ -17536,7 +17518,7 @@
                     <a:lstStyle/>
                     <a:p>
                       <a:r>
-                        <a:rPr sz="900" b="0" i="0">
+                        <a:rPr sz="1100" b="0" i="0">
                           <a:solidFill>
                             <a:srgbClr val="1A1440"/>
                           </a:solidFill>
@@ -17558,35 +17540,13 @@
                     <a:lstStyle/>
                     <a:p>
                       <a:r>
-                        <a:rPr sz="900" b="0" i="0">
+                        <a:rPr sz="1100" b="0" i="0">
                           <a:solidFill>
                             <a:srgbClr val="1A1440"/>
                           </a:solidFill>
                           <a:latin typeface="Calibri"/>
                         </a:rPr>
-                        <a:t>Rs 260</a:t>
-                      </a:r>
-                    </a:p>
-                  </a:txBody>
-                  <a:tcPr marL="101600" marR="101600" marT="38100" marB="38100" anchor="ctr">
-                    <a:solidFill>
-                      <a:srgbClr val="FFFFFF"/>
-                    </a:solidFill>
-                  </a:tcPr>
-                </a:tc>
-                <a:tc>
-                  <a:txBody>
-                    <a:bodyPr/>
-                    <a:lstStyle/>
-                    <a:p>
-                      <a:r>
-                        <a:rPr sz="900" b="0" i="0">
-                          <a:solidFill>
-                            <a:srgbClr val="1A1440"/>
-                          </a:solidFill>
-                          <a:latin typeface="Calibri"/>
-                        </a:rPr>
-                        <a:t>down 17 percent</a:t>
+                        <a:t>Rs 260, down 17 percent</a:t>
                       </a:r>
                     </a:p>
                   </a:txBody>
@@ -17597,14 +17557,14 @@
                   </a:tcPr>
                 </a:tc>
               </a:tr>
-              <a:tr h="438912">
+              <a:tr h="318008">
                 <a:tc>
                   <a:txBody>
                     <a:bodyPr/>
                     <a:lstStyle/>
                     <a:p>
                       <a:r>
-                        <a:rPr sz="900" b="0" i="0">
+                        <a:rPr sz="1100" b="0" i="0">
                           <a:solidFill>
                             <a:srgbClr val="1A1440"/>
                           </a:solidFill>
@@ -17626,7 +17586,7 @@
                     <a:lstStyle/>
                     <a:p>
                       <a:r>
-                        <a:rPr sz="900" b="0" i="0">
+                        <a:rPr sz="1100" b="0" i="0">
                           <a:solidFill>
                             <a:srgbClr val="1A1440"/>
                           </a:solidFill>
@@ -17648,35 +17608,13 @@
                     <a:lstStyle/>
                     <a:p>
                       <a:r>
-                        <a:rPr sz="900" b="0" i="0">
+                        <a:rPr sz="1100" b="0" i="0">
                           <a:solidFill>
                             <a:srgbClr val="1A1440"/>
                           </a:solidFill>
                           <a:latin typeface="Calibri"/>
                         </a:rPr>
-                        <a:t>Rs 165</a:t>
-                      </a:r>
-                    </a:p>
-                  </a:txBody>
-                  <a:tcPr marL="101600" marR="101600" marT="38100" marB="38100" anchor="ctr">
-                    <a:solidFill>
-                      <a:srgbClr val="F4F2FA"/>
-                    </a:solidFill>
-                  </a:tcPr>
-                </a:tc>
-                <a:tc>
-                  <a:txBody>
-                    <a:bodyPr/>
-                    <a:lstStyle/>
-                    <a:p>
-                      <a:r>
-                        <a:rPr sz="900" b="0" i="0">
-                          <a:solidFill>
-                            <a:srgbClr val="1A1440"/>
-                          </a:solidFill>
-                          <a:latin typeface="Calibri"/>
-                        </a:rPr>
-                        <a:t>flat</a:t>
+                        <a:t>Rs 165, flat</a:t>
                       </a:r>
                     </a:p>
                   </a:txBody>
@@ -17687,14 +17625,14 @@
                   </a:tcPr>
                 </a:tc>
               </a:tr>
-              <a:tr h="438912">
+              <a:tr h="318008">
                 <a:tc>
                   <a:txBody>
                     <a:bodyPr/>
                     <a:lstStyle/>
                     <a:p>
                       <a:r>
-                        <a:rPr sz="900" b="0" i="0">
+                        <a:rPr sz="1100" b="0" i="0">
                           <a:solidFill>
                             <a:srgbClr val="1A1440"/>
                           </a:solidFill>
@@ -17716,7 +17654,7 @@
                     <a:lstStyle/>
                     <a:p>
                       <a:r>
-                        <a:rPr sz="900" b="0" i="0">
+                        <a:rPr sz="1100" b="0" i="0">
                           <a:solidFill>
                             <a:srgbClr val="1A1440"/>
                           </a:solidFill>
@@ -17738,35 +17676,13 @@
                     <a:lstStyle/>
                     <a:p>
                       <a:r>
-                        <a:rPr sz="900" b="0" i="0">
+                        <a:rPr sz="1100" b="0" i="0">
                           <a:solidFill>
                             <a:srgbClr val="1A1440"/>
                           </a:solidFill>
                           <a:latin typeface="Calibri"/>
                         </a:rPr>
-                        <a:t>Rs 5,861</a:t>
-                      </a:r>
-                    </a:p>
-                  </a:txBody>
-                  <a:tcPr marL="101600" marR="101600" marT="38100" marB="38100" anchor="ctr">
-                    <a:solidFill>
-                      <a:srgbClr val="FFFFFF"/>
-                    </a:solidFill>
-                  </a:tcPr>
-                </a:tc>
-                <a:tc>
-                  <a:txBody>
-                    <a:bodyPr/>
-                    <a:lstStyle/>
-                    <a:p>
-                      <a:r>
-                        <a:rPr sz="900" b="0" i="0">
-                          <a:solidFill>
-                            <a:srgbClr val="1A1440"/>
-                          </a:solidFill>
-                          <a:latin typeface="Calibri"/>
-                        </a:rPr>
-                        <a:t>up 0.8 percent</a:t>
+                        <a:t>Rs 5,861, up 0.8 percent</a:t>
                       </a:r>
                     </a:p>
                   </a:txBody>
@@ -17777,14 +17693,14 @@
                   </a:tcPr>
                 </a:tc>
               </a:tr>
-              <a:tr h="438912">
+              <a:tr h="318008">
                 <a:tc>
                   <a:txBody>
                     <a:bodyPr/>
                     <a:lstStyle/>
                     <a:p>
                       <a:r>
-                        <a:rPr sz="900" b="0" i="0">
+                        <a:rPr sz="1100" b="0" i="0">
                           <a:solidFill>
                             <a:srgbClr val="1A1440"/>
                           </a:solidFill>
@@ -17806,13 +17722,13 @@
                     <a:lstStyle/>
                     <a:p>
                       <a:r>
-                        <a:rPr sz="900" b="0" i="0">
+                        <a:rPr sz="1100" b="0" i="0">
                           <a:solidFill>
                             <a:srgbClr val="1A1440"/>
                           </a:solidFill>
                           <a:latin typeface="Calibri"/>
                         </a:rPr>
-                        <a:t>1,18,000</a:t>
+                        <a:t>118,000</a:t>
                       </a:r>
                     </a:p>
                   </a:txBody>
@@ -17828,35 +17744,13 @@
                     <a:lstStyle/>
                     <a:p>
                       <a:r>
-                        <a:rPr sz="900" b="0" i="0">
+                        <a:rPr sz="1100" b="0" i="0">
                           <a:solidFill>
                             <a:srgbClr val="1A1440"/>
                           </a:solidFill>
                           <a:latin typeface="Calibri"/>
                         </a:rPr>
-                        <a:t>1,46,300</a:t>
-                      </a:r>
-                    </a:p>
-                  </a:txBody>
-                  <a:tcPr marL="101600" marR="101600" marT="38100" marB="38100" anchor="ctr">
-                    <a:solidFill>
-                      <a:srgbClr val="F4F2FA"/>
-                    </a:solidFill>
-                  </a:tcPr>
-                </a:tc>
-                <a:tc>
-                  <a:txBody>
-                    <a:bodyPr/>
-                    <a:lstStyle/>
-                    <a:p>
-                      <a:r>
-                        <a:rPr sz="900" b="0" i="0">
-                          <a:solidFill>
-                            <a:srgbClr val="1A1440"/>
-                          </a:solidFill>
-                          <a:latin typeface="Calibri"/>
-                        </a:rPr>
-                        <a:t>up 24 percent</a:t>
+                        <a:t>146,300, up 24 percent</a:t>
                       </a:r>
                     </a:p>
                   </a:txBody>
@@ -17879,8 +17773,8 @@
         </p:nvSpPr>
         <p:spPr>
           <a:xfrm>
-            <a:off x="6370167" y="1682496"/>
-            <a:ext cx="5291175" cy="2585719"/>
+            <a:off x="530352" y="4637786"/>
+            <a:ext cx="11130991" cy="861060"/>
           </a:xfrm>
           <a:prstGeom prst="roundRect">
             <a:avLst>
@@ -17927,8 +17821,8 @@
         </p:nvSpPr>
         <p:spPr>
           <a:xfrm>
-            <a:off x="6516471" y="1810512"/>
-            <a:ext cx="45720" cy="2329687"/>
+            <a:off x="676656" y="4765802"/>
+            <a:ext cx="45720" cy="605028"/>
           </a:xfrm>
           <a:prstGeom prst="roundRect">
             <a:avLst>
@@ -17973,8 +17867,8 @@
         </p:nvSpPr>
         <p:spPr>
           <a:xfrm>
-            <a:off x="6717639" y="1801368"/>
-            <a:ext cx="4724247" cy="2402839"/>
+            <a:off x="877824" y="4756658"/>
+            <a:ext cx="10564063" cy="678180"/>
           </a:xfrm>
           <a:prstGeom prst="rect">
             <a:avLst/>
@@ -17988,7 +17882,7 @@
           <a:lstStyle/>
           <a:p>
             <a:r>
-              <a:rPr sz="1300" b="1">
+              <a:rPr sz="1100" b="1">
                 <a:solidFill>
                   <a:srgbClr val="5B3FD6"/>
                 </a:solidFill>
@@ -17997,16 +17891,16 @@
               <a:t>Data. </a:t>
             </a:r>
             <a:r>
-              <a:rPr sz="1300" b="0" i="0">
+              <a:rPr sz="1100" b="0" i="0">
                 <a:solidFill>
                   <a:srgbClr val="1A1440"/>
                 </a:solidFill>
                 <a:latin typeface="Calibri"/>
               </a:rPr>
-              <a:t>Monday's tables: driver_weeks (one row per driver per week, with peak_online_hours, peak_trips, peak_bookings_rs, topup_rs) and zone_weeks (rider requests and median wait by zone and week). </a:t>
-            </a:r>
-            <a:r>
-              <a:rPr sz="1300" b="1" i="0">
+              <a:t>Monday's driver_weeks and zone_weeks. </a:t>
+            </a:r>
+            <a:r>
+              <a:rPr sz="1100" b="1" i="0">
                 <a:solidFill>
                   <a:srgbClr val="1A1440"/>
                 </a:solidFill>
@@ -18015,16 +17909,16 @@
               <a:t>The afternoon ask.</a:t>
             </a:r>
             <a:r>
-              <a:rPr sz="1300" b="0" i="0">
+              <a:rPr sz="1100" b="0" i="0">
                 <a:solidFill>
                   <a:srgbClr val="1A1440"/>
                 </a:solidFill>
                 <a:latin typeface="Calibri"/>
               </a:rPr>
-              <a:t> Roughly how many drivers must be online at the weekday evening peak to keep the median rider wait under five minutes, in fifteen minutes, without a dataset. </a:t>
-            </a:r>
-            <a:r>
-              <a:rPr sz="1300" b="1" i="0">
+              <a:t> How many drivers must be online at the weekday evening peak to keep the median rider wait under five minutes, sized in fifteen minutes without a dataset. </a:t>
+            </a:r>
+            <a:r>
+              <a:rPr sz="1100" b="1" i="0">
                 <a:solidFill>
                   <a:srgbClr val="1A1440"/>
                 </a:solidFill>
@@ -18033,13 +17927,13 @@
               <a:t>Caveats.</a:t>
             </a:r>
             <a:r>
-              <a:rPr sz="1300" b="0" i="0">
+              <a:rPr sz="1100" b="0" i="0">
                 <a:solidFill>
                   <a:srgbClr val="1A1440"/>
                 </a:solidFill>
                 <a:latin typeface="Calibri"/>
               </a:rPr>
-              <a:t> Each objection is partly right; the peak window is three hours long; no published figure exists for the number a sanity check on the afternoon ask would want.</a:t>
+              <a:t> Each objection is partly right; the peak window is three hours long; no published figure exists to check the afternoon's answer against.</a:t>
             </a:r>
           </a:p>
         </p:txBody>
@@ -18052,8 +17946,8 @@
         </p:nvSpPr>
         <p:spPr>
           <a:xfrm>
-            <a:off x="6370167" y="4432807"/>
-            <a:ext cx="45720" cy="929640"/>
+            <a:off x="530352" y="5663438"/>
+            <a:ext cx="45720" cy="396240"/>
           </a:xfrm>
           <a:prstGeom prst="roundRect">
             <a:avLst>
@@ -18098,8 +17992,8 @@
         </p:nvSpPr>
         <p:spPr>
           <a:xfrm>
-            <a:off x="6626199" y="4432807"/>
-            <a:ext cx="4980279" cy="929640"/>
+            <a:off x="786384" y="5663438"/>
+            <a:ext cx="10820095" cy="396240"/>
           </a:xfrm>
           <a:prstGeom prst="rect">
             <a:avLst/>
@@ -18113,7 +18007,7 @@
           <a:lstStyle/>
           <a:p>
             <a:r>
-              <a:rPr sz="1400" b="0" i="1">
+              <a:rPr sz="1200" b="0" i="1">
                 <a:solidFill>
                   <a:srgbClr val="1A0F5C"/>
                 </a:solidFill>
@@ -18639,7 +18533,7 @@
       </p:sp>
       <p:pic>
         <p:nvPicPr>
-          <p:cNvPr id="9" name="mermaid diagram" descr="2a1d5801311aac30.png"/>
+          <p:cNvPr id="9" name="mermaid diagram" descr="4d8a47354834f8c3.png"/>
           <p:cNvPicPr>
             <a:picLocks noChangeAspect="1"/>
           </p:cNvPicPr>
@@ -18653,8 +18547,8 @@
         </p:blipFill>
         <p:spPr>
           <a:xfrm>
-            <a:off x="2152497" y="1901952"/>
-            <a:ext cx="7886700" cy="2857500"/>
+            <a:off x="2152497" y="1956816"/>
+            <a:ext cx="7886700" cy="2100262"/>
           </a:xfrm>
           <a:prstGeom prst="rect">
             <a:avLst/>
@@ -18663,67 +18557,101 @@
       </p:pic>
       <p:sp>
         <p:nvSpPr>
-          <p:cNvPr id="10" name="Rounded Rectangle 9"/>
+          <p:cNvPr id="10" name="TextBox 9"/>
+          <p:cNvSpPr txBox="1"/>
+          <p:nvPr/>
+        </p:nvSpPr>
+        <p:spPr>
+          <a:xfrm>
+            <a:off x="530352" y="4203382"/>
+            <a:ext cx="11130991" cy="1324864"/>
+          </a:xfrm>
+          <a:prstGeom prst="rect">
+            <a:avLst/>
+          </a:prstGeom>
+          <a:noFill/>
+        </p:spPr>
+        <p:txBody>
+          <a:bodyPr wrap="square" anchor="t" lIns="0" rIns="0" tIns="0" bIns="0">
+            <a:spAutoFit/>
+          </a:bodyPr>
+          <a:lstStyle/>
+          <a:p>
+            <a:pPr>
+              <a:spcAft>
+                <a:spcPts val="800"/>
+              </a:spcAft>
+            </a:pPr>
+            <a:r>
+              <a:rPr sz="1600" b="1" i="0">
+                <a:solidFill>
+                  <a:srgbClr val="1A1440"/>
+                </a:solidFill>
+                <a:latin typeface="Calibri"/>
+              </a:rPr>
+              <a:t>Chapter 1 adds</a:t>
+            </a:r>
+            <a:r>
+              <a:rPr sz="1600" b="0" i="0">
+                <a:solidFill>
+                  <a:srgbClr val="1A1440"/>
+                </a:solidFill>
+                <a:latin typeface="Calibri"/>
+              </a:rPr>
+              <a:t> the claim (the scheme pays for idle hours) and its denominator (Rs 314 to Rs 260 per peak online hour). </a:t>
+            </a:r>
+            <a:r>
+              <a:rPr sz="1600" b="1" i="0">
+                <a:solidFill>
+                  <a:srgbClr val="1A1440"/>
+                </a:solidFill>
+                <a:latin typeface="Calibri"/>
+              </a:rPr>
+              <a:t>Said plainly:</a:t>
+            </a:r>
+            <a:r>
+              <a:rPr sz="1600" b="0" i="0">
+                <a:solidFill>
+                  <a:srgbClr val="1A1440"/>
+                </a:solidFill>
+                <a:latin typeface="Calibri"/>
+              </a:rPr>
+              <a:t> "An hour online used to bring in Rs 314 of fares and now brings in Rs 260, because more of those hours have no rider." </a:t>
+            </a:r>
+            <a:r>
+              <a:rPr sz="1600" b="1" i="0">
+                <a:solidFill>
+                  <a:srgbClr val="1A1440"/>
+                </a:solidFill>
+                <a:latin typeface="Calibri"/>
+              </a:rPr>
+              <a:t>In the interview</a:t>
+            </a:r>
+            <a:r>
+              <a:rPr sz="1600" b="0" i="0">
+                <a:solidFill>
+                  <a:srgbClr val="1A1440"/>
+                </a:solidFill>
+                <a:latin typeface="Calibri"/>
+              </a:rPr>
+              <a:t> [S]: present a recommendation to a non-technical stakeholder in two minutes, opening on that sentence.</a:t>
+            </a:r>
+          </a:p>
+        </p:txBody>
+      </p:sp>
+      <p:sp>
+        <p:nvSpPr>
+          <p:cNvPr id="11" name="Oval 10"/>
           <p:cNvSpPr/>
           <p:nvPr/>
         </p:nvSpPr>
         <p:spPr>
           <a:xfrm>
-            <a:off x="530352" y="4905756"/>
-            <a:ext cx="11130991" cy="1074420"/>
-          </a:xfrm>
-          <a:prstGeom prst="roundRect">
-            <a:avLst>
-              <a:gd name="adj" fmla="val 8000"/>
-            </a:avLst>
-          </a:prstGeom>
-          <a:solidFill>
-            <a:srgbClr val="F7F5FD"/>
-          </a:solidFill>
-          <a:ln w="9525">
-            <a:solidFill>
-              <a:srgbClr val="E4E1F1"/>
-            </a:solidFill>
-          </a:ln>
-          <a:effectLst/>
-        </p:spPr>
-        <p:style>
-          <a:lnRef idx="1">
-            <a:schemeClr val="accent1"/>
-          </a:lnRef>
-          <a:fillRef idx="3">
-            <a:schemeClr val="accent1"/>
-          </a:fillRef>
-          <a:effectRef idx="2">
-            <a:schemeClr val="accent1"/>
-          </a:effectRef>
-          <a:fontRef idx="minor">
-            <a:schemeClr val="lt1"/>
-          </a:fontRef>
-        </p:style>
-        <p:txBody>
-          <a:bodyPr rtlCol="0" anchor="ctr" wrap="square"/>
-          <a:lstStyle/>
-          <a:p>
-            <a:pPr algn="ctr"/>
-          </a:p>
-        </p:txBody>
-      </p:sp>
-      <p:sp>
-        <p:nvSpPr>
-          <p:cNvPr id="11" name="Rounded Rectangle 10"/>
-          <p:cNvSpPr/>
-          <p:nvPr/>
-        </p:nvSpPr>
-        <p:spPr>
-          <a:xfrm>
-            <a:off x="676656" y="5033772"/>
-            <a:ext cx="45720" cy="818388"/>
-          </a:xfrm>
-          <a:prstGeom prst="roundRect">
-            <a:avLst>
-              <a:gd name="adj" fmla="val 50000"/>
-            </a:avLst>
+            <a:off x="530352" y="6492240"/>
+            <a:ext cx="64008" cy="64008"/>
+          </a:xfrm>
+          <a:prstGeom prst="ellipse">
+            <a:avLst/>
           </a:prstGeom>
           <a:solidFill>
             <a:srgbClr val="5B3FD6"/>
@@ -18763,111 +18691,6 @@
         </p:nvSpPr>
         <p:spPr>
           <a:xfrm>
-            <a:off x="877824" y="5024628"/>
-            <a:ext cx="10564063" cy="891540"/>
-          </a:xfrm>
-          <a:prstGeom prst="rect">
-            <a:avLst/>
-          </a:prstGeom>
-          <a:noFill/>
-        </p:spPr>
-        <p:txBody>
-          <a:bodyPr wrap="square" anchor="ctr" lIns="0" rIns="0" tIns="0" bIns="0">
-            <a:spAutoFit/>
-          </a:bodyPr>
-          <a:lstStyle/>
-          <a:p>
-            <a:r>
-              <a:rPr sz="1500" b="1">
-                <a:solidFill>
-                  <a:srgbClr val="5B3FD6"/>
-                </a:solidFill>
-                <a:latin typeface="Calibri"/>
-              </a:rPr>
-              <a:t>Said plainly: </a:t>
-            </a:r>
-            <a:r>
-              <a:rPr sz="1500" b="0" i="0">
-                <a:solidFill>
-                  <a:srgbClr val="1A1440"/>
-                </a:solidFill>
-                <a:latin typeface="Calibri"/>
-              </a:rPr>
-              <a:t>"An hour online used to bring in Rs 314 of fares and now brings in Rs 260, because more of those hours have no rider." </a:t>
-            </a:r>
-            <a:r>
-              <a:rPr sz="1500" b="1" i="0">
-                <a:solidFill>
-                  <a:srgbClr val="1A1440"/>
-                </a:solidFill>
-                <a:latin typeface="Calibri"/>
-              </a:rPr>
-              <a:t>In the interview</a:t>
-            </a:r>
-            <a:r>
-              <a:rPr sz="1500" b="0" i="0">
-                <a:solidFill>
-                  <a:srgbClr val="1A1440"/>
-                </a:solidFill>
-                <a:latin typeface="Calibri"/>
-              </a:rPr>
-              <a:t> [S]: present a recommendation to a non-technical stakeholder in two minutes, opening on that sentence.</a:t>
-            </a:r>
-          </a:p>
-        </p:txBody>
-      </p:sp>
-      <p:sp>
-        <p:nvSpPr>
-          <p:cNvPr id="13" name="Oval 12"/>
-          <p:cNvSpPr/>
-          <p:nvPr/>
-        </p:nvSpPr>
-        <p:spPr>
-          <a:xfrm>
-            <a:off x="530352" y="6492240"/>
-            <a:ext cx="64008" cy="64008"/>
-          </a:xfrm>
-          <a:prstGeom prst="ellipse">
-            <a:avLst/>
-          </a:prstGeom>
-          <a:solidFill>
-            <a:srgbClr val="5B3FD6"/>
-          </a:solidFill>
-          <a:ln>
-            <a:noFill/>
-          </a:ln>
-          <a:effectLst/>
-        </p:spPr>
-        <p:style>
-          <a:lnRef idx="1">
-            <a:schemeClr val="accent1"/>
-          </a:lnRef>
-          <a:fillRef idx="3">
-            <a:schemeClr val="accent1"/>
-          </a:fillRef>
-          <a:effectRef idx="2">
-            <a:schemeClr val="accent1"/>
-          </a:effectRef>
-          <a:fontRef idx="minor">
-            <a:schemeClr val="lt1"/>
-          </a:fontRef>
-        </p:style>
-        <p:txBody>
-          <a:bodyPr rtlCol="0" anchor="ctr" wrap="square"/>
-          <a:lstStyle/>
-          <a:p>
-            <a:pPr algn="ctr"/>
-          </a:p>
-        </p:txBody>
-      </p:sp>
-      <p:sp>
-        <p:nvSpPr>
-          <p:cNvPr id="14" name="TextBox 13"/>
-          <p:cNvSpPr txBox="1"/>
-          <p:nvPr/>
-        </p:nvSpPr>
-        <p:spPr>
-          <a:xfrm>
             <a:off x="640080" y="6437376"/>
             <a:ext cx="1286446" cy="152146"/>
           </a:xfrm>
@@ -18897,7 +18720,7 @@
       </p:sp>
       <p:sp>
         <p:nvSpPr>
-          <p:cNvPr id="15" name="Oval 14"/>
+          <p:cNvPr id="13" name="Oval 12"/>
           <p:cNvSpPr/>
           <p:nvPr/>
         </p:nvSpPr>
@@ -18941,7 +18764,7 @@
       </p:sp>
       <p:sp>
         <p:nvSpPr>
-          <p:cNvPr id="16" name="TextBox 15"/>
+          <p:cNvPr id="14" name="TextBox 13"/>
           <p:cNvSpPr txBox="1"/>
           <p:nvPr/>
         </p:nvSpPr>
@@ -18976,7 +18799,7 @@
       </p:sp>
       <p:sp>
         <p:nvSpPr>
-          <p:cNvPr id="17" name="Oval 16"/>
+          <p:cNvPr id="15" name="Oval 14"/>
           <p:cNvSpPr/>
           <p:nvPr/>
         </p:nvSpPr>
@@ -19020,7 +18843,7 @@
       </p:sp>
       <p:sp>
         <p:nvSpPr>
-          <p:cNvPr id="18" name="TextBox 17"/>
+          <p:cNvPr id="16" name="TextBox 15"/>
           <p:cNvSpPr txBox="1"/>
           <p:nvPr/>
         </p:nvSpPr>
@@ -19055,7 +18878,7 @@
       </p:sp>
       <p:sp>
         <p:nvSpPr>
-          <p:cNvPr id="19" name="TextBox 18"/>
+          <p:cNvPr id="17" name="TextBox 16"/>
           <p:cNvSpPr txBox="1"/>
           <p:nvPr/>
         </p:nvSpPr>
@@ -19874,7 +19697,7 @@
                 </a:solidFill>
                 <a:latin typeface="Calibri"/>
               </a:rPr>
-              <a:t>- a) The driver-operations lead: "Drivers will log off and supply at peak will fall"</a:t>
+              <a:t>a) The driver-operations lead: "Drivers will log off and supply at peak will fall"</a:t>
             </a:r>
           </a:p>
           <a:p>
@@ -19890,7 +19713,7 @@
                 </a:solidFill>
                 <a:latin typeface="Calibri"/>
               </a:rPr>
-              <a:t>- b) The marketing lead: "The guarantee is on every hoarding; changing it six weeks in looks like bait"</a:t>
+              <a:t>b) The marketing lead: "The guarantee is on every hoarding; changing it six weeks in looks like bait"</a:t>
             </a:r>
           </a:p>
           <a:p>
@@ -19906,7 +19729,7 @@
                 </a:solidFill>
                 <a:latin typeface="Calibri"/>
               </a:rPr>
-              <a:t>- c) The finance partner: "The fall in bookings per hour is the monsoon ending, not the scheme"</a:t>
+              <a:t>c) The finance partner: "The fall in bookings per hour is the monsoon ending"</a:t>
             </a:r>
           </a:p>
           <a:p>
@@ -19922,7 +19745,7 @@
                 </a:solidFill>
                 <a:latin typeface="Calibri"/>
               </a:rPr>
-              <a:t>- d) None of them outright, because each objection is partly right</a:t>
+              <a:t>d) None of them outright, because each objection is partly right</a:t>
             </a:r>
           </a:p>
         </p:txBody>
@@ -20588,7 +20411,7 @@
                           </a:solidFill>
                           <a:latin typeface="Calibri"/>
                         </a:rPr>
-                        <a:t>The other 1,020 drivers held at 1.90 to 1.89 trips per online hour and keep the floor if they accept</a:t>
+                        <a:t>The other 880 drivers, there before the launch, held at 1.90 trips per online hour and keep the floor if they accept</a:t>
                       </a:r>
                     </a:p>
                   </a:txBody>
@@ -27727,7 +27550,7 @@
                 </a:solidFill>
                 <a:latin typeface="Calibri"/>
               </a:rPr>
-              <a:t>- a) The caveat that the monsoon ended inside the window</a:t>
+              <a:t>a) The caveat that the monsoon ended inside the window</a:t>
             </a:r>
           </a:p>
           <a:p>
@@ -27743,7 +27566,7 @@
                 </a:solidFill>
                 <a:latin typeface="Calibri"/>
               </a:rPr>
-              <a:t>- b) The per-driver-week and per-trip reads, with one line each on what moved them</a:t>
+              <a:t>b) The per-driver-week and per-trip reads, with one line each on what moved them</a:t>
             </a:r>
           </a:p>
           <a:p>
@@ -27759,7 +27582,7 @@
                 </a:solidFill>
                 <a:latin typeface="Calibri"/>
               </a:rPr>
-              <a:t>- c) The action and its saving range</a:t>
+              <a:t>c) The action and its saving range</a:t>
             </a:r>
           </a:p>
           <a:p>
@@ -27775,7 +27598,7 @@
                 </a:solidFill>
                 <a:latin typeface="Calibri"/>
               </a:rPr>
-              <a:t>- d) The chart of bookings per peak online hour</a:t>
+              <a:t>d) The chart of bookings per peak online hour</a:t>
             </a:r>
           </a:p>
         </p:txBody>
@@ -33135,7 +32958,7 @@
                 </a:solidFill>
                 <a:latin typeface="Georgia"/>
               </a:rPr>
-              <a:t>"The scheme is paying for online hours that carry no trips: gross bookings per peak online hour fell from Rs 314 to Rs 260 while the fare held at Rs 165. The monsoon ended inside the window, so part of the fall may be the season. Pay per completed peak trip with an acceptance floor; that returns Rs 58 lakh to Rs 93 lakh over six weeks if a fifth to a half of the idle drivers start accepting."</a:t>
+              <a:t>"The scheme is paying for online hours that carry no trips: gross bookings per peak online hour fell from Rs 314 to Rs 260 while the fare held at Rs 165. The monsoon ended inside the window, so part of the fall may be the season. Pay per completed peak trip with an acceptance floor; that returns Rs 58 lakh to Rs 92.7 lakh over six weeks depending on whether half or a fifth of the idle drivers start accepting."</a:t>
             </a:r>
           </a:p>
         </p:txBody>
@@ -35577,7 +35400,7 @@
                 </a:solidFill>
                 <a:latin typeface="Calibri"/>
               </a:rPr>
-              <a:t>- a) Peak guarantee: six-week review</a:t>
+              <a:t>a) Peak guarantee: six-week review</a:t>
             </a:r>
           </a:p>
           <a:p>
@@ -35593,7 +35416,7 @@
                 </a:solidFill>
                 <a:latin typeface="Calibri"/>
               </a:rPr>
-              <a:t>- b) Online hours up 24 percent, trips up 3 percent</a:t>
+              <a:t>b) Online hours up 24 percent, trips up 3 percent</a:t>
             </a:r>
           </a:p>
           <a:p>
@@ -35609,7 +35432,7 @@
                 </a:solidFill>
                 <a:latin typeface="Calibri"/>
               </a:rPr>
-              <a:t>- c) The scheme pays for idle hours: pay per completed trip</a:t>
+              <a:t>c) The scheme pays for idle hours: pay per completed trip</a:t>
             </a:r>
           </a:p>
           <a:p>
@@ -35625,7 +35448,7 @@
                 </a:solidFill>
                 <a:latin typeface="Calibri"/>
               </a:rPr>
-              <a:t>- d) Hyderabad operations update, October</a:t>
+              <a:t>d) Hyderabad operations update, October</a:t>
             </a:r>
           </a:p>
           <a:p>

--- a/content/W04/D2/slides/C2_W04_D02_half1_STUDENT.pptx
+++ b/content/W04/D2/slides/C2_W04_D02_half1_STUDENT.pptx
@@ -991,27 +991,37 @@
           <a:lstStyle/>
           <a:p>
             <a:r>
-              <a:t>LIVE, 5 minutes. The week of 10 August against the week of 21 September. Count aloud, column by</a:t>
-            </a:r>
-          </a:p>
-          <a:p>
-            <a:r>
-              <a:t>column: 60 and 74 hours, 114 and 88 trips, 18,810 and 14,520 rupees. Divide three times for each</a:t>
-            </a:r>
-          </a:p>
-          <a:p>
-            <a:r>
-              <a:t>week and say the three verdicts. E and F are Monday's two idle-tail drivers, which is why six</a:t>
-            </a:r>
-          </a:p>
-          <a:p>
-            <a:r>
-              <a:t>drivers fall further than the city.</a:t>
-            </a:r>
-          </a:p>
-          <a:p>
-            <a:r>
-              <a:t>Transition: the same arithmetic as a picture.</a:t>
+              <a:t>LIVE, 5 minutes. Twelve driver-weeks: six drivers, the week of 10 August against the week of 21</a:t>
+            </a:r>
+          </a:p>
+          <a:p>
+            <a:r>
+              <a:t>September. Count aloud, column by column: 60 and 74 hours, 114 and 88 trips, 18,810 and 14,520</a:t>
+            </a:r>
+          </a:p>
+          <a:p>
+            <a:r>
+              <a:t>rupees. Divide three times for each week and say the three verdicts. E and F are Monday's two</a:t>
+            </a:r>
+          </a:p>
+          <a:p>
+            <a:r>
+              <a:t>idle-tail drivers, which is why six drivers fall further than the city. These six drive about 10</a:t>
+            </a:r>
+          </a:p>
+          <a:p>
+            <a:r>
+              <a:t>peak hours a week against the city's 18.6, so their rupees per driver-week sit below the city's:</a:t>
+            </a:r>
+          </a:p>
+          <a:p>
+            <a:r>
+              <a:t>the hand count is for the method, and the city's numbers come next.</a:t>
+            </a:r>
+          </a:p>
+          <a:p>
+            <a:r>
+              <a:t>Transition: the city does something the six did not.</a:t>
             </a:r>
           </a:p>
         </p:txBody>
@@ -1081,12 +1091,12 @@
           <a:lstStyle/>
           <a:p>
             <a:r>
-              <a:t>LIVE, 2 minutes. Per driver-week here means per active driver-week. On six drivers the per-driver-week read fell, because the six are the same six in</a:t>
-            </a:r>
-          </a:p>
-          <a:p>
-            <a:r>
-              <a:t>both weeks. The city's driver-weeks move. Each learner writes a letter.</a:t>
+              <a:t>LIVE, 2 minutes. Per driver-week means per active driver-week: one driver with a row that week.</a:t>
+            </a:r>
+          </a:p>
+          <a:p>
+            <a:r>
+              <a:t>Each learner writes a letter. Expect votes on a, since new drivers are the obvious change.</a:t>
             </a:r>
           </a:p>
           <a:p>
@@ -1161,22 +1171,17 @@
           <a:lstStyle/>
           <a:p>
             <a:r>
-              <a:t>LIVE, 4 minutes. Trace the violet line first: a step at the launch, then flat. The amber line rises</a:t>
-            </a:r>
-          </a:p>
-          <a:p>
-            <a:r>
-              <a:t>and then slides below 100 by the last week, so even the window's 0.8 percent rise hides a weekly</a:t>
-            </a:r>
-          </a:p>
-          <a:p>
-            <a:r>
-              <a:t>slide. Ask which role will quote the amber line. Expect the marketing lead. Explorer scene T2 lets</a:t>
-            </a:r>
-          </a:p>
-          <a:p>
-            <a:r>
-              <a:t>learners pick the denominator.</a:t>
+              <a:t>LIVE, 4 minutes. Trace the violet line first: a step at the launch, then flat. Then the amber line:</a:t>
+            </a:r>
+          </a:p>
+          <a:p>
+            <a:r>
+              <a:t>up while hours climbed, down as trips per hour kept falling. Ask which role will quote the amber</a:t>
+            </a:r>
+          </a:p>
+          <a:p>
+            <a:r>
+              <a:t>line. Expect the marketing lead. Explorer scene T2 lets learners pick the denominator.</a:t>
             </a:r>
           </a:p>
           <a:p>
@@ -1251,12 +1256,17 @@
           <a:lstStyle/>
           <a:p>
             <a:r>
-              <a:t>LIVE, 4 minutes. Write the three growth rates on the board: bookings 3.0, driver-weeks 2.2, ratio</a:t>
-            </a:r>
-          </a:p>
-          <a:p>
-            <a:r>
-              <a:t>0.8. An active driver-week is a driver with a row that week, never a sign-up to the guarantee.</a:t>
+              <a:t>LIVE, 4 minutes. Write the split on the board: Rs per driver-week = Rs per hour x hours per</a:t>
+            </a:r>
+          </a:p>
+          <a:p>
+            <a:r>
+              <a:t>driver-week. Then the three growth rates: bookings 3.0, driver-weeks 2.2, ratio 0.8. An active</a:t>
+            </a:r>
+          </a:p>
+          <a:p>
+            <a:r>
+              <a:t>driver-week is a driver with a row that week, never a sign-up to the guarantee.</a:t>
             </a:r>
           </a:p>
           <a:p>
@@ -1656,12 +1666,17 @@
           <a:lstStyle/>
           <a:p>
             <a:r>
-              <a:t>LIVE, 3 minutes. Vote, two minutes with a neighbour, revote. Count both votes on the board.</a:t>
-            </a:r>
-          </a:p>
-          <a:p>
-            <a:r>
-              <a:t>Transition: the true part of each.</a:t>
+              <a:t>LIVE, 3 minutes. Vote, two minutes with a neighbour, revote. Count both votes on the board. Expect</a:t>
+            </a:r>
+          </a:p>
+          <a:p>
+            <a:r>
+              <a:t>votes on a, since it is the number everyone quotes.</a:t>
+            </a:r>
+          </a:p>
+          <a:p>
+            <a:r>
+              <a:t>Transition: the true part of each objection.</a:t>
             </a:r>
           </a:p>
         </p:txBody>
@@ -1741,7 +1756,17 @@
           </a:p>
           <a:p>
             <a:r>
-              <a:t>joiners, and none of the joiners is in the tail.</a:t>
+              <a:t>joiners, and none of the joiners is in the tail. The 180 had also run at 1.90 trips an hour before</a:t>
+            </a:r>
+          </a:p>
+          <a:p>
+            <a:r>
+              <a:t>the launch, so the tail is drivers who changed, never drivers who were always slow. Weekly requests</a:t>
+            </a:r>
+          </a:p>
+          <a:p>
+            <a:r>
+              <a:t>in the last three weeks ran 41,161 to 42,602, against 41,155 to 42,719 before the launch.</a:t>
             </a:r>
           </a:p>
           <a:p>
@@ -2391,7 +2416,12 @@
           </a:p>
           <a:p>
             <a:r>
-              <a:t>fifth to a half of that is still paid because those drivers start accepting.</a:t>
+              <a:t>half to a fifth of that is still paid because those drivers start accepting: half still paid saves</a:t>
+            </a:r>
+          </a:p>
+          <a:p>
+            <a:r>
+              <a:t>Rs 58 lakh, a fifth saves Rs 92.7 lakh. S4 shows the working.</a:t>
             </a:r>
           </a:p>
           <a:p>
@@ -2641,7 +2671,12 @@
           </a:p>
           <a:p>
             <a:r>
-              <a:t>supports.</a:t>
+              <a:t>supports. The two that carry it: the wait barely moved, and each extra trip cost Rs 2,836 of top-up</a:t>
+            </a:r>
+          </a:p>
+          <a:p>
+            <a:r>
+              <a:t>(Rs 1.9 crore over the 6,700 extra trips).</a:t>
             </a:r>
           </a:p>
           <a:p>
@@ -6638,8 +6673,8 @@
         </p:nvSpPr>
         <p:spPr>
           <a:xfrm>
-            <a:off x="530352" y="1822450"/>
-            <a:ext cx="11130991" cy="841248"/>
+            <a:off x="530352" y="1682496"/>
+            <a:ext cx="5291175" cy="1428496"/>
           </a:xfrm>
           <a:prstGeom prst="rect">
             <a:avLst/>
@@ -6654,11 +6689,11 @@
           <a:p>
             <a:pPr>
               <a:spcAft>
-                <a:spcPts val="600"/>
+                <a:spcPts val="700"/>
               </a:spcAft>
             </a:pPr>
             <a:r>
-              <a:rPr sz="1200" b="1" i="0">
+              <a:rPr sz="1400" b="1" i="0">
                 <a:solidFill>
                   <a:srgbClr val="1A1440"/>
                 </a:solidFill>
@@ -6667,13 +6702,13 @@
               <a:t>Uber, Hyderabad, the driver app's peak-hour earnings guarantee, one day on.</a:t>
             </a:r>
             <a:r>
-              <a:rPr sz="1200" b="0" i="0">
+              <a:rPr sz="1400" b="0" i="0">
                 <a:solidFill>
                   <a:srgbClr val="1A1440"/>
                 </a:solidFill>
                 <a:latin typeface="Calibri"/>
               </a:rPr>
-              <a:t> The city head takes the redesign to Thursday's city review on one slide, in five minutes. The driver-operations lead, the marketing lead and the finance partner each lose something under it, and each will say so.</a:t>
+              <a:t> Thursday's city review gets one slide, five minutes, and three people who each lose under it. Gross bookings are what riders paid; an active driver-week is one driver with a row that week.</a:t>
             </a:r>
           </a:p>
         </p:txBody>
@@ -6687,8 +6722,8 @@
           <p:nvPr/>
         </p:nvGraphicFramePr>
         <p:xfrm>
-          <a:off x="530352" y="2791714"/>
-          <a:ext cx="11130990" cy="1590040"/>
+          <a:off x="530352" y="3239008"/>
+          <a:ext cx="5291174" cy="1938528"/>
         </p:xfrm>
         <a:graphic>
           <a:graphicData uri="http://schemas.openxmlformats.org/drawingml/2006/table">
@@ -6697,18 +6732,18 @@
                 <a:tableStyleId>{2D5ABB26-0587-4C30-8999-92F81FD0307C}</a:tableStyleId>
               </a:tblPr>
               <a:tblGrid>
-                <a:gridCol w="5062503"/>
-                <a:gridCol w="2649835"/>
-                <a:gridCol w="3418652"/>
+                <a:gridCol w="2190445"/>
+                <a:gridCol w="1351856"/>
+                <a:gridCol w="1748873"/>
               </a:tblGrid>
-              <a:tr h="318008">
+              <a:tr h="310896">
                 <a:tc>
                   <a:txBody>
                     <a:bodyPr/>
                     <a:lstStyle/>
                     <a:p>
                       <a:r>
-                        <a:rPr sz="1150" b="1" i="0">
+                        <a:rPr sz="950" b="1" i="0">
                           <a:solidFill>
                             <a:srgbClr val="FFFFFF"/>
                           </a:solidFill>
@@ -6730,7 +6765,7 @@
                     <a:lstStyle/>
                     <a:p>
                       <a:r>
-                        <a:rPr sz="1150" b="1" i="0">
+                        <a:rPr sz="950" b="1" i="0">
                           <a:solidFill>
                             <a:srgbClr val="FFFFFF"/>
                           </a:solidFill>
@@ -6752,7 +6787,7 @@
                     <a:lstStyle/>
                     <a:p>
                       <a:r>
-                        <a:rPr sz="1150" b="1" i="0">
+                        <a:rPr sz="950" b="1" i="0">
                           <a:solidFill>
                             <a:srgbClr val="FFFFFF"/>
                           </a:solidFill>
@@ -6769,14 +6804,14 @@
                   </a:tcPr>
                 </a:tc>
               </a:tr>
-              <a:tr h="318008">
+              <a:tr h="438912">
                 <a:tc>
                   <a:txBody>
                     <a:bodyPr/>
                     <a:lstStyle/>
                     <a:p>
                       <a:r>
-                        <a:rPr sz="1100" b="0" i="0">
+                        <a:rPr sz="900" b="0" i="0">
                           <a:solidFill>
                             <a:srgbClr val="1A1440"/>
                           </a:solidFill>
@@ -6798,7 +6833,7 @@
                     <a:lstStyle/>
                     <a:p>
                       <a:r>
-                        <a:rPr sz="1100" b="0" i="0">
+                        <a:rPr sz="900" b="0" i="0">
                           <a:solidFill>
                             <a:srgbClr val="1A1440"/>
                           </a:solidFill>
@@ -6820,7 +6855,7 @@
                     <a:lstStyle/>
                     <a:p>
                       <a:r>
-                        <a:rPr sz="1100" b="0" i="0">
+                        <a:rPr sz="900" b="0" i="0">
                           <a:solidFill>
                             <a:srgbClr val="1A1440"/>
                           </a:solidFill>
@@ -6837,14 +6872,14 @@
                   </a:tcPr>
                 </a:tc>
               </a:tr>
-              <a:tr h="318008">
+              <a:tr h="438912">
                 <a:tc>
                   <a:txBody>
                     <a:bodyPr/>
                     <a:lstStyle/>
                     <a:p>
                       <a:r>
-                        <a:rPr sz="1100" b="0" i="0">
+                        <a:rPr sz="900" b="0" i="0">
                           <a:solidFill>
                             <a:srgbClr val="1A1440"/>
                           </a:solidFill>
@@ -6866,7 +6901,7 @@
                     <a:lstStyle/>
                     <a:p>
                       <a:r>
-                        <a:rPr sz="1100" b="0" i="0">
+                        <a:rPr sz="900" b="0" i="0">
                           <a:solidFill>
                             <a:srgbClr val="1A1440"/>
                           </a:solidFill>
@@ -6888,7 +6923,7 @@
                     <a:lstStyle/>
                     <a:p>
                       <a:r>
-                        <a:rPr sz="1100" b="0" i="0">
+                        <a:rPr sz="900" b="0" i="0">
                           <a:solidFill>
                             <a:srgbClr val="1A1440"/>
                           </a:solidFill>
@@ -6905,14 +6940,14 @@
                   </a:tcPr>
                 </a:tc>
               </a:tr>
-              <a:tr h="318008">
+              <a:tr h="438912">
                 <a:tc>
                   <a:txBody>
                     <a:bodyPr/>
                     <a:lstStyle/>
                     <a:p>
                       <a:r>
-                        <a:rPr sz="1100" b="0" i="0">
+                        <a:rPr sz="900" b="0" i="0">
                           <a:solidFill>
                             <a:srgbClr val="1A1440"/>
                           </a:solidFill>
@@ -6934,7 +6969,7 @@
                     <a:lstStyle/>
                     <a:p>
                       <a:r>
-                        <a:rPr sz="1100" b="0" i="0">
+                        <a:rPr sz="900" b="0" i="0">
                           <a:solidFill>
                             <a:srgbClr val="1A1440"/>
                           </a:solidFill>
@@ -6956,7 +6991,7 @@
                     <a:lstStyle/>
                     <a:p>
                       <a:r>
-                        <a:rPr sz="1100" b="0" i="0">
+                        <a:rPr sz="900" b="0" i="0">
                           <a:solidFill>
                             <a:srgbClr val="1A1440"/>
                           </a:solidFill>
@@ -6973,14 +7008,14 @@
                   </a:tcPr>
                 </a:tc>
               </a:tr>
-              <a:tr h="318008">
+              <a:tr h="310896">
                 <a:tc>
                   <a:txBody>
                     <a:bodyPr/>
                     <a:lstStyle/>
                     <a:p>
                       <a:r>
-                        <a:rPr sz="1100" b="0" i="0">
+                        <a:rPr sz="900" b="0" i="0">
                           <a:solidFill>
                             <a:srgbClr val="1A1440"/>
                           </a:solidFill>
@@ -7002,7 +7037,7 @@
                     <a:lstStyle/>
                     <a:p>
                       <a:r>
-                        <a:rPr sz="1100" b="0" i="0">
+                        <a:rPr sz="900" b="0" i="0">
                           <a:solidFill>
                             <a:srgbClr val="1A1440"/>
                           </a:solidFill>
@@ -7024,7 +7059,7 @@
                     <a:lstStyle/>
                     <a:p>
                       <a:r>
-                        <a:rPr sz="1100" b="0" i="0">
+                        <a:rPr sz="900" b="0" i="0">
                           <a:solidFill>
                             <a:srgbClr val="1A1440"/>
                           </a:solidFill>
@@ -7053,8 +7088,8 @@
         </p:nvSpPr>
         <p:spPr>
           <a:xfrm>
-            <a:off x="530352" y="4637786"/>
-            <a:ext cx="11130991" cy="861060"/>
+            <a:off x="6370167" y="1682496"/>
+            <a:ext cx="5291175" cy="1892299"/>
           </a:xfrm>
           <a:prstGeom prst="roundRect">
             <a:avLst>
@@ -7101,8 +7136,8 @@
         </p:nvSpPr>
         <p:spPr>
           <a:xfrm>
-            <a:off x="676656" y="4765802"/>
-            <a:ext cx="45720" cy="605028"/>
+            <a:off x="6516471" y="1810512"/>
+            <a:ext cx="45720" cy="1636267"/>
           </a:xfrm>
           <a:prstGeom prst="roundRect">
             <a:avLst>
@@ -7147,8 +7182,8 @@
         </p:nvSpPr>
         <p:spPr>
           <a:xfrm>
-            <a:off x="877824" y="4756658"/>
-            <a:ext cx="10564063" cy="678180"/>
+            <a:off x="6717639" y="1801368"/>
+            <a:ext cx="4724247" cy="1709419"/>
           </a:xfrm>
           <a:prstGeom prst="rect">
             <a:avLst/>
@@ -7162,7 +7197,7 @@
           <a:lstStyle/>
           <a:p>
             <a:r>
-              <a:rPr sz="1100" b="1">
+              <a:rPr sz="1300" b="1">
                 <a:solidFill>
                   <a:srgbClr val="5B3FD6"/>
                 </a:solidFill>
@@ -7171,34 +7206,34 @@
               <a:t>Data. </a:t>
             </a:r>
             <a:r>
-              <a:rPr sz="1100" b="0" i="0">
+              <a:rPr sz="1300" b="0" i="0">
                 <a:solidFill>
                   <a:srgbClr val="1A1440"/>
                 </a:solidFill>
                 <a:latin typeface="Calibri"/>
               </a:rPr>
-              <a:t>Monday's driver_weeks and zone_weeks. </a:t>
-            </a:r>
-            <a:r>
-              <a:rPr sz="1100" b="1" i="0">
+              <a:t>Monday's driver_weeks (peak_online_hours, peak_trips, peak_bookings_rs, topup_rs) and zone_weeks (peak_requests, median_wait_min). </a:t>
+            </a:r>
+            <a:r>
+              <a:rPr sz="1300" b="1" i="0">
                 <a:solidFill>
                   <a:srgbClr val="1A1440"/>
                 </a:solidFill>
                 <a:latin typeface="Calibri"/>
               </a:rPr>
-              <a:t>The afternoon ask.</a:t>
-            </a:r>
-            <a:r>
-              <a:rPr sz="1100" b="0" i="0">
+              <a:t>Afternoon ask.</a:t>
+            </a:r>
+            <a:r>
+              <a:rPr sz="1300" b="0" i="0">
                 <a:solidFill>
                   <a:srgbClr val="1A1440"/>
                 </a:solidFill>
                 <a:latin typeface="Calibri"/>
               </a:rPr>
-              <a:t> How many drivers must be online at the weekday evening peak to keep the median rider wait under five minutes, sized in fifteen minutes without a dataset. </a:t>
-            </a:r>
-            <a:r>
-              <a:rPr sz="1100" b="1" i="0">
+              <a:t> Drivers online at the three-hour weekday evening peak for a median wait under five minutes, in fifteen minutes. </a:t>
+            </a:r>
+            <a:r>
+              <a:rPr sz="1300" b="1" i="0">
                 <a:solidFill>
                   <a:srgbClr val="1A1440"/>
                 </a:solidFill>
@@ -7207,13 +7242,13 @@
               <a:t>Caveats.</a:t>
             </a:r>
             <a:r>
-              <a:rPr sz="1100" b="0" i="0">
+              <a:rPr sz="1300" b="0" i="0">
                 <a:solidFill>
                   <a:srgbClr val="1A1440"/>
                 </a:solidFill>
                 <a:latin typeface="Calibri"/>
               </a:rPr>
-              <a:t> Each objection is partly right; the peak window is three hours long; no published figure exists to check the afternoon's answer against.</a:t>
+              <a:t> Each objection is partly right; no published figure checks the afternoon's answer.</a:t>
             </a:r>
           </a:p>
         </p:txBody>
@@ -7226,8 +7261,8 @@
         </p:nvSpPr>
         <p:spPr>
           <a:xfrm>
-            <a:off x="530352" y="5663438"/>
-            <a:ext cx="45720" cy="396240"/>
+            <a:off x="6370167" y="3739388"/>
+            <a:ext cx="45720" cy="929640"/>
           </a:xfrm>
           <a:prstGeom prst="roundRect">
             <a:avLst>
@@ -7272,8 +7307,8 @@
         </p:nvSpPr>
         <p:spPr>
           <a:xfrm>
-            <a:off x="786384" y="5663438"/>
-            <a:ext cx="10820095" cy="396240"/>
+            <a:off x="6626199" y="3739388"/>
+            <a:ext cx="4980279" cy="929640"/>
           </a:xfrm>
           <a:prstGeom prst="rect">
             <a:avLst/>
@@ -7287,7 +7322,7 @@
           <a:lstStyle/>
           <a:p>
             <a:r>
-              <a:rPr sz="1200" b="0" i="1">
+              <a:rPr sz="1400" b="0" i="1">
                 <a:solidFill>
                   <a:srgbClr val="1A0F5C"/>
                 </a:solidFill>
@@ -7820,7 +7855,7 @@
         <p:spPr>
           <a:xfrm>
             <a:off x="530352" y="1956816"/>
-            <a:ext cx="11130991" cy="2040128"/>
+            <a:ext cx="11130991" cy="2316480"/>
           </a:xfrm>
           <a:prstGeom prst="rect">
             <a:avLst/>
@@ -7893,7 +7928,7 @@
                 </a:solidFill>
                 <a:latin typeface="Calibri"/>
               </a:rPr>
-              <a:t>d) Acceptance share 0.86 to 0.73 and top-up paid Rs 1.9 crore</a:t>
+              <a:t>d) Acceptance share 86 to 73 percent and top-up paid Rs 1.9 crore</a:t>
             </a:r>
           </a:p>
           <a:p>
@@ -7902,6 +7937,33 @@
                 <a:spcPts val="800"/>
               </a:spcAft>
             </a:pPr>
+            <a:r>
+              <a:rPr sz="1600" b="0" i="0">
+                <a:solidFill>
+                  <a:srgbClr val="1A1440"/>
+                </a:solidFill>
+                <a:latin typeface="Calibri"/>
+              </a:rPr>
+              <a:t>The </a:t>
+            </a:r>
+            <a:r>
+              <a:rPr sz="1600" b="1" i="0">
+                <a:solidFill>
+                  <a:srgbClr val="1A1440"/>
+                </a:solidFill>
+                <a:latin typeface="Calibri"/>
+              </a:rPr>
+              <a:t>acceptance share</a:t>
+            </a:r>
+            <a:r>
+              <a:rPr sz="1600" b="0" i="0">
+                <a:solidFill>
+                  <a:srgbClr val="1A1440"/>
+                </a:solidFill>
+                <a:latin typeface="Calibri"/>
+              </a:rPr>
+              <a:t> is requests a driver accepted over requests offered to them. </a:t>
+            </a:r>
             <a:r>
               <a:rPr sz="1600" b="1" i="0">
                 <a:solidFill>
@@ -8452,8 +8514,8 @@
         </p:blipFill>
         <p:spPr>
           <a:xfrm>
-            <a:off x="3131304" y="1664208"/>
-            <a:ext cx="5929085" cy="3378200"/>
+            <a:off x="2585686" y="1664208"/>
+            <a:ext cx="7020321" cy="3378200"/>
           </a:xfrm>
           <a:prstGeom prst="rect">
             <a:avLst/>
@@ -8627,7 +8689,7 @@
                 </a:solidFill>
                 <a:latin typeface="Calibri"/>
               </a:rPr>
-              <a:t>Trips per online hour falling at a flat fare is bookings per online hour falling, Rs 314 to Rs 260, and the 61 percent says where the top-up went.</a:t>
+              <a:t>Trips per online hour falling at a flat fare is bookings per online hour falling, Rs 314 to Rs 260: that is the chart. The 61 percent, the one number beside it, says where the top-up went. Option a is Monday's trap resold: online hours rose 24 percent while riders barely gained.</a:t>
             </a:r>
           </a:p>
         </p:txBody>
@@ -9954,7 +10016,7 @@
                 </a:solidFill>
                 <a:latin typeface="Calibri"/>
               </a:rPr>
-              <a:t>The claim is drafted for you: "Rs 1.16 crore of the top-up went to driver-weeks that accepted fewer than half their offers." Choose the one number that proves it, and the caveat that sits beside it.</a:t>
+              <a:t>The claim is drafted for you: "Most of the top-up went to driver-weeks that accepted fewer than half their offers." Choose the one number that proves it, and keep the monsoon caveat beside it.</a:t>
             </a:r>
           </a:p>
         </p:txBody>
@@ -10491,9 +10553,9 @@
                 <a:tableStyleId>{2D5ABB26-0587-4C30-8999-92F81FD0307C}</a:tableStyleId>
               </a:tblPr>
               <a:tblGrid>
-                <a:gridCol w="6930402"/>
-                <a:gridCol w="3286188"/>
-                <a:gridCol w="914400"/>
+                <a:gridCol w="7049047"/>
+                <a:gridCol w="1707100"/>
+                <a:gridCol w="2374843"/>
               </a:tblGrid>
               <a:tr h="335280">
                 <a:tc>
@@ -10598,7 +10660,7 @@
                           </a:solidFill>
                           <a:latin typeface="Calibri"/>
                         </a:rPr>
-                        <a:t>1,200 (140 new)</a:t>
+                        <a:t>1,060</a:t>
                       </a:r>
                     </a:p>
                   </a:txBody>
@@ -10612,7 +10674,17 @@
                   <a:txBody>
                     <a:bodyPr/>
                     <a:lstStyle/>
-                    <a:p/>
+                    <a:p>
+                      <a:r>
+                        <a:rPr sz="1200" b="0" i="0">
+                          <a:solidFill>
+                            <a:srgbClr val="1A1440"/>
+                          </a:solidFill>
+                          <a:latin typeface="Calibri"/>
+                        </a:rPr>
+                        <a:t>1,200 (140 new)</a:t>
+                      </a:r>
+                    </a:p>
                   </a:txBody>
                   <a:tcPr marL="101600" marR="101600" marT="38100" marB="38100" anchor="ctr">
                     <a:solidFill>
@@ -10702,7 +10774,7 @@
                           </a:solidFill>
                           <a:latin typeface="Calibri"/>
                         </a:rPr>
-                        <a:t>Offers shown to drivers</a:t>
+                        <a:t>Offers shown (a declined request is offered again)</a:t>
                       </a:r>
                     </a:p>
                   </a:txBody>
@@ -10792,7 +10864,7 @@
                           </a:solidFill>
                           <a:latin typeface="Calibri"/>
                         </a:rPr>
-                        <a:t>0.86</a:t>
+                        <a:t>86 percent</a:t>
                       </a:r>
                     </a:p>
                   </a:txBody>
@@ -10814,7 +10886,7 @@
                           </a:solidFill>
                           <a:latin typeface="Calibri"/>
                         </a:rPr>
-                        <a:t>0.73</a:t>
+                        <a:t>73 percent</a:t>
                       </a:r>
                     </a:p>
                   </a:txBody>
@@ -10860,7 +10932,7 @@
                           </a:solidFill>
                           <a:latin typeface="Calibri"/>
                         </a:rPr>
-                        <a:t>0.04</a:t>
+                        <a:t>4 percent</a:t>
                       </a:r>
                     </a:p>
                   </a:txBody>
@@ -10882,7 +10954,7 @@
                           </a:solidFill>
                           <a:latin typeface="Calibri"/>
                         </a:rPr>
-                        <a:t>0.09</a:t>
+                        <a:t>9 percent</a:t>
                       </a:r>
                     </a:p>
                   </a:txBody>
@@ -11122,7 +11194,7 @@
                           </a:solidFill>
                           <a:latin typeface="Calibri"/>
                         </a:rPr>
-                        <a:t>0.11</a:t>
+                        <a:t>11 percent</a:t>
                       </a:r>
                     </a:p>
                   </a:txBody>
@@ -11144,7 +11216,7 @@
                           </a:solidFill>
                           <a:latin typeface="Calibri"/>
                         </a:rPr>
-                        <a:t>0.10</a:t>
+                        <a:t>10 percent</a:t>
                       </a:r>
                     </a:p>
                   </a:txBody>
@@ -11822,7 +11894,7 @@
                 </a:solidFill>
                 <a:latin typeface="Calibri"/>
               </a:rPr>
-              <a:t>What do six drivers in two weeks say when the denominator changes?</a:t>
+              <a:t>What do six drivers, one week before the launch and one after, say when the denominator changes?</a:t>
             </a:r>
           </a:p>
         </p:txBody>
@@ -11837,7 +11909,7 @@
         </p:nvGraphicFramePr>
         <p:xfrm>
           <a:off x="530352" y="1956816"/>
-          <a:ext cx="11130988" cy="2682240"/>
+          <a:ext cx="11130990" cy="2682240"/>
         </p:xfrm>
         <a:graphic>
           <a:graphicData uri="http://schemas.openxmlformats.org/drawingml/2006/table">
@@ -11847,13 +11919,13 @@
               </a:tblPr>
               <a:tblGrid>
                 <a:gridCol w="914400"/>
-                <a:gridCol w="1564898"/>
-                <a:gridCol w="1608526"/>
-                <a:gridCol w="1608526"/>
-                <a:gridCol w="1275371"/>
-                <a:gridCol w="1497474"/>
-                <a:gridCol w="1497474"/>
-                <a:gridCol w="1164319"/>
+                <a:gridCol w="1425450"/>
+                <a:gridCol w="1566346"/>
+                <a:gridCol w="1566346"/>
+                <a:gridCol w="1262878"/>
+                <a:gridCol w="1566346"/>
+                <a:gridCol w="1566346"/>
+                <a:gridCol w="1262878"/>
               </a:tblGrid>
               <a:tr h="335280">
                 <a:tc>
@@ -11912,7 +11984,7 @@
                           </a:solidFill>
                           <a:latin typeface="Calibri"/>
                         </a:rPr>
-                        <a:t>Hours before</a:t>
+                        <a:t>Hours, 10 Aug</a:t>
                       </a:r>
                     </a:p>
                   </a:txBody>
@@ -11934,7 +12006,7 @@
                           </a:solidFill>
                           <a:latin typeface="Calibri"/>
                         </a:rPr>
-                        <a:t>Trips before</a:t>
+                        <a:t>Trips, 10 Aug</a:t>
                       </a:r>
                     </a:p>
                   </a:txBody>
@@ -11956,7 +12028,7 @@
                           </a:solidFill>
                           <a:latin typeface="Calibri"/>
                         </a:rPr>
-                        <a:t>Rs before</a:t>
+                        <a:t>Rs, 10 Aug</a:t>
                       </a:r>
                     </a:p>
                   </a:txBody>
@@ -11978,7 +12050,7 @@
                           </a:solidFill>
                           <a:latin typeface="Calibri"/>
                         </a:rPr>
-                        <a:t>Hours after</a:t>
+                        <a:t>Hours, 21 Sep</a:t>
                       </a:r>
                     </a:p>
                   </a:txBody>
@@ -12000,7 +12072,7 @@
                           </a:solidFill>
                           <a:latin typeface="Calibri"/>
                         </a:rPr>
-                        <a:t>Trips after</a:t>
+                        <a:t>Trips, 21 Sep</a:t>
                       </a:r>
                     </a:p>
                   </a:txBody>
@@ -12022,7 +12094,7 @@
                           </a:solidFill>
                           <a:latin typeface="Calibri"/>
                         </a:rPr>
-                        <a:t>Rs after</a:t>
+                        <a:t>Rs, 21 Sep</a:t>
                       </a:r>
                     </a:p>
                   </a:txBody>
@@ -13919,7 +13991,7 @@
                 </a:solidFill>
                 <a:latin typeface="Georgia"/>
               </a:rPr>
-              <a:t>Predict: which way does each read go for the city?</a:t>
+              <a:t>Predict: why does the city's per-driver-week rise?</a:t>
             </a:r>
           </a:p>
         </p:txBody>
@@ -13954,7 +14026,7 @@
                 </a:solidFill>
                 <a:latin typeface="Calibri"/>
               </a:rPr>
-              <a:t>Over all the driver-weeks, which pair of moves holds?</a:t>
+              <a:t>On the six drivers per driver-week fell 23 percent; on the city it rose 0.8 percent. Why?</a:t>
             </a:r>
           </a:p>
         </p:txBody>
@@ -13968,7 +14040,7 @@
         <p:spPr>
           <a:xfrm>
             <a:off x="530352" y="1956816"/>
-            <a:ext cx="11130991" cy="2316480"/>
+            <a:ext cx="11130991" cy="2592832"/>
           </a:xfrm>
           <a:prstGeom prst="rect">
             <a:avLst/>
@@ -13987,13 +14059,22 @@
               </a:spcAft>
             </a:pPr>
             <a:r>
+              <a:rPr sz="1600" b="1" i="0">
+                <a:solidFill>
+                  <a:srgbClr val="1A1440"/>
+                </a:solidFill>
+                <a:latin typeface="Calibri"/>
+              </a:rPr>
+              <a:t>Before the city, an auto driver (invented).</a:t>
+            </a:r>
+            <a:r>
               <a:rPr sz="1600" b="0" i="0">
                 <a:solidFill>
                   <a:srgbClr val="1A1440"/>
                 </a:solidFill>
                 <a:latin typeface="Calibri"/>
               </a:rPr>
-              <a:t>a) Per hour falls; per driver-week falls</a:t>
+              <a:t> Rs 1,800 on Monday from 20 rides in 9 hours, and Rs 1,800 on Tuesday from 18 rides in 12 hours: per day flat, per ride up from Rs 90 to Rs 100, per hour down from Rs 200 to Rs 150. The denominator picks the direction.</a:t>
             </a:r>
           </a:p>
           <a:p>
@@ -14009,7 +14090,7 @@
                 </a:solidFill>
                 <a:latin typeface="Calibri"/>
               </a:rPr>
-              <a:t>b) Per hour falls; per driver-week rises a little</a:t>
+              <a:t>a) The 140 new drivers earned more than the rest</a:t>
             </a:r>
           </a:p>
           <a:p>
@@ -14025,7 +14106,7 @@
                 </a:solidFill>
                 <a:latin typeface="Calibri"/>
               </a:rPr>
-              <a:t>c) Per hour holds; per driver-week falls</a:t>
+              <a:t>b) Each driver-week carried more online hours</a:t>
             </a:r>
           </a:p>
           <a:p>
@@ -14041,7 +14122,7 @@
                 </a:solidFill>
                 <a:latin typeface="Calibri"/>
               </a:rPr>
-              <a:t>d) Both hold nearly flat</a:t>
+              <a:t>c) The fare rose after the launch</a:t>
             </a:r>
           </a:p>
           <a:p>
@@ -14051,22 +14132,13 @@
               </a:spcAft>
             </a:pPr>
             <a:r>
-              <a:rPr sz="1600" b="1" i="0">
+              <a:rPr sz="1600" b="0" i="0">
                 <a:solidFill>
                   <a:srgbClr val="1A1440"/>
                 </a:solidFill>
                 <a:latin typeface="Calibri"/>
               </a:rPr>
-              <a:t>On the six drivers,</a:t>
-            </a:r>
-            <a:r>
-              <a:rPr sz="1600" b="0" i="0">
-                <a:solidFill>
-                  <a:srgbClr val="1A1440"/>
-                </a:solidFill>
-                <a:latin typeface="Calibri"/>
-              </a:rPr>
-              <a:t> per driver-week fell 23 percent because the same six drivers sit in both weeks; the city's count of active driver-weeks moves.</a:t>
+              <a:t>d) Fewer drivers sat idle after the launch</a:t>
             </a:r>
           </a:p>
         </p:txBody>
@@ -14544,7 +14616,7 @@
                 </a:solidFill>
                 <a:latin typeface="Georgia"/>
               </a:rPr>
-              <a:t>Answer: per hour falls, per driver-week rises</a:t>
+              <a:t>Answer: more hours a driver-week, less per hour</a:t>
             </a:r>
           </a:p>
         </p:txBody>
@@ -14579,7 +14651,7 @@
                 </a:solidFill>
                 <a:latin typeface="Calibri"/>
               </a:rPr>
-              <a:t>What do the twelve weeks show for each denominator?</a:t>
+              <a:t>How can per driver-week rise while per hour falls?</a:t>
             </a:r>
           </a:p>
         </p:txBody>
@@ -14600,8 +14672,8 @@
         </p:blipFill>
         <p:spPr>
           <a:xfrm>
-            <a:off x="2928551" y="1664208"/>
-            <a:ext cx="6334591" cy="3342640"/>
+            <a:off x="3121654" y="1664208"/>
+            <a:ext cx="5948386" cy="3147060"/>
           </a:xfrm>
           <a:prstGeom prst="rect">
             <a:avLst/>
@@ -14616,7 +14688,7 @@
         </p:nvSpPr>
         <p:spPr>
           <a:xfrm>
-            <a:off x="530352" y="5043424"/>
+            <a:off x="530352" y="4847844"/>
             <a:ext cx="11130991" cy="316992"/>
           </a:xfrm>
           <a:prstGeom prst="rect">
@@ -14651,8 +14723,8 @@
         </p:nvSpPr>
         <p:spPr>
           <a:xfrm>
-            <a:off x="530352" y="5369560"/>
-            <a:ext cx="11130991" cy="665480"/>
+            <a:off x="530352" y="5173980"/>
+            <a:ext cx="11130991" cy="861060"/>
           </a:xfrm>
           <a:prstGeom prst="roundRect">
             <a:avLst>
@@ -14699,8 +14771,8 @@
         </p:nvSpPr>
         <p:spPr>
           <a:xfrm>
-            <a:off x="676656" y="5497576"/>
-            <a:ext cx="45720" cy="409448"/>
+            <a:off x="676656" y="5301996"/>
+            <a:ext cx="45720" cy="605028"/>
           </a:xfrm>
           <a:prstGeom prst="roundRect">
             <a:avLst>
@@ -14745,8 +14817,8 @@
         </p:nvSpPr>
         <p:spPr>
           <a:xfrm>
-            <a:off x="877824" y="5488432"/>
-            <a:ext cx="10564063" cy="482600"/>
+            <a:off x="877824" y="5292852"/>
+            <a:ext cx="10564063" cy="678180"/>
           </a:xfrm>
           <a:prstGeom prst="rect">
             <a:avLst/>
@@ -14775,7 +14847,7 @@
                 </a:solidFill>
                 <a:latin typeface="Calibri"/>
               </a:rPr>
-              <a:t>Per peak online hour the rupees fell 17 percent, Rs 314 to Rs 260. Per active driver-week they rose 0.8 percent, Rs 5,817 to Rs 5,861. Per trip they held at Rs 165. Each line is divided by its own before-window value, so all three start near 100.</a:t>
+              <a:t>Rupees per driver-week is rupees per hour times hours per driver-week, so the hours are Rs 5,817 / Rs 313.5 = 18.6 a driver-week before and Rs 5,861 / Rs 260.4 = 22.5 after. Each driver-week carried about four more online hours while each hour brought in 17 percent less. Each line is the week over its before-window average, times 100; the amber line rose, then slid below 100.</a:t>
             </a:r>
           </a:p>
         </p:txBody>
@@ -15288,7 +15360,7 @@
                 </a:solidFill>
                 <a:latin typeface="Calibri"/>
               </a:rPr>
-              <a:t>Why does the rise in bookings per active driver-week say nothing about the scheme?</a:t>
+              <a:t>Why does the rise in bookings per active driver-week say nothing good about the scheme?</a:t>
             </a:r>
           </a:p>
         </p:txBody>
@@ -15439,7 +15511,7 @@
         <p:spPr>
           <a:xfrm>
             <a:off x="530352" y="3195828"/>
-            <a:ext cx="11130991" cy="1341120"/>
+            <a:ext cx="11130991" cy="1607820"/>
           </a:xfrm>
           <a:prstGeom prst="roundRect">
             <a:avLst>
@@ -15487,7 +15559,7 @@
         <p:spPr>
           <a:xfrm>
             <a:off x="676656" y="3323844"/>
-            <a:ext cx="45720" cy="1085088"/>
+            <a:ext cx="45720" cy="1351788"/>
           </a:xfrm>
           <a:prstGeom prst="roundRect">
             <a:avLst>
@@ -15533,7 +15605,7 @@
         <p:spPr>
           <a:xfrm>
             <a:off x="877824" y="3314700"/>
-            <a:ext cx="10564063" cy="1158240"/>
+            <a:ext cx="10564063" cy="1424940"/>
           </a:xfrm>
           <a:prstGeom prst="rect">
             <a:avLst/>
@@ -15562,7 +15634,7 @@
                 </a:solidFill>
                 <a:latin typeface="Calibri"/>
               </a:rPr>
-              <a:t>The read is bookings over active driver-weeks, and online hours do not enter it. Bookings rose 3.0 percent because trips rose 3 percent at the same fare; active driver-weeks rose 2.2 percent, 6,360 to 6,500, because the 140 drivers who joined after the launch added 140 driver-weeks between them. The ratio rose 0.8 percent with no driver earning more for an hour online.</a:t>
+              <a:t>Bookings rose 3.0 percent and active driver-weeks 2.2 percent (6,360 to 6,500), so the ratio rose 0.8 percent (1.030 / 1.022 = 1.008). The rise was bought with hours: 21 percent more online hours a driver-week for 17 percent less per hour. The 140 drivers who joined after the launch drove about one week each, at Rs 4,314 a driver-week, so they pulled the read down; the drivers there before the launch rose 1.4 percent.</a:t>
             </a:r>
           </a:p>
         </p:txBody>
@@ -15575,8 +15647,8 @@
         </p:nvSpPr>
         <p:spPr>
           <a:xfrm>
-            <a:off x="530352" y="4701540"/>
-            <a:ext cx="11130991" cy="807720"/>
+            <a:off x="530352" y="4968240"/>
+            <a:ext cx="11130991" cy="541020"/>
           </a:xfrm>
           <a:prstGeom prst="roundRect">
             <a:avLst>
@@ -15623,8 +15695,8 @@
         </p:nvSpPr>
         <p:spPr>
           <a:xfrm>
-            <a:off x="676656" y="4829556"/>
-            <a:ext cx="45720" cy="551688"/>
+            <a:off x="676656" y="5096256"/>
+            <a:ext cx="45720" cy="284988"/>
           </a:xfrm>
           <a:prstGeom prst="roundRect">
             <a:avLst>
@@ -15669,8 +15741,8 @@
         </p:nvSpPr>
         <p:spPr>
           <a:xfrm>
-            <a:off x="877824" y="4820412"/>
-            <a:ext cx="10564063" cy="624840"/>
+            <a:off x="877824" y="5087112"/>
+            <a:ext cx="10564063" cy="358140"/>
           </a:xfrm>
           <a:prstGeom prst="rect">
             <a:avLst/>
@@ -15699,7 +15771,7 @@
                 </a:solidFill>
                 <a:latin typeface="Calibri"/>
               </a:rPr>
-              <a:t>The slide names the denominator the scheme pays per, the peak online hour, and keeps the other two reads in the appendix with one line each on what moved them.</a:t>
+              <a:t>The slide names the denominator the scheme pays for, the peak online hour, and says it aloud.</a:t>
             </a:r>
           </a:p>
         </p:txBody>
@@ -16431,7 +16503,7 @@
                 </a:solidFill>
                 <a:latin typeface="Calibri"/>
               </a:rPr>
-              <a:t>RS 165 X 1.58 TRIPS PER HOUR</a:t>
+              <a:t>RS 165 X 1.578 TRIPS PER HOUR</a:t>
             </a:r>
           </a:p>
         </p:txBody>
@@ -16673,7 +16745,7 @@
         <p:spPr>
           <a:xfrm>
             <a:off x="530352" y="3419856"/>
-            <a:ext cx="11130991" cy="772160"/>
+            <a:ext cx="11130991" cy="1048512"/>
           </a:xfrm>
           <a:prstGeom prst="rect">
             <a:avLst/>
@@ -16698,7 +16770,7 @@
                 </a:solidFill>
                 <a:latin typeface="Calibri"/>
               </a:rPr>
-              <a:t>Bookings divided by hours and fare times trips per hour land on the same rupees in both windows.</a:t>
+              <a:t>Rupees per hour is the fare times trips per hour, so the two routes always agree; the split shows which half moved.</a:t>
             </a:r>
             <a:r>
               <a:rPr sz="1600" b="0" i="0">
@@ -16707,7 +16779,7 @@
                 </a:solidFill>
                 <a:latin typeface="Calibri"/>
               </a:rPr>
-              <a:t> The finance partner will ask whether riders paid less; they did not.</a:t>
+              <a:t> The fare held, so the whole fall is trips per hour, 1.90 to 1.578 (230,900 / 146,300, printed as 1.58). The finance partner will ask whether riders paid less; they did not.</a:t>
             </a:r>
           </a:p>
         </p:txBody>
@@ -17258,7 +17330,7 @@
         <p:spPr>
           <a:xfrm>
             <a:off x="530352" y="4203382"/>
-            <a:ext cx="11130991" cy="1324864"/>
+            <a:ext cx="11130991" cy="1601216"/>
           </a:xfrm>
           <a:prstGeom prst="rect">
             <a:avLst/>
@@ -17328,7 +17400,7 @@
                 </a:solidFill>
                 <a:latin typeface="Calibri"/>
               </a:rPr>
-              <a:t> [S]: present a recommendation to a non-technical stakeholder in two minutes, opening on that sentence.</a:t>
+              <a:t> [S], a staple asked everywhere in this programme's interview tags: present a recommendation to a non-technical stakeholder in two minutes, opening on that sentence.</a:t>
             </a:r>
           </a:p>
         </p:txBody>
@@ -17848,7 +17920,7 @@
       </p:sp>
       <p:pic>
         <p:nvPicPr>
-          <p:cNvPr id="9" name="mermaid diagram" descr="9accff29b0dbf78f.png"/>
+          <p:cNvPr id="9" name="mermaid diagram" descr="4a6dd0cdefb73055.png"/>
           <p:cNvPicPr>
             <a:picLocks noChangeAspect="1"/>
           </p:cNvPicPr>
@@ -17863,7 +17935,7 @@
         <p:spPr>
           <a:xfrm>
             <a:off x="530352" y="1956816"/>
-            <a:ext cx="11130991" cy="2447239"/>
+            <a:ext cx="11130991" cy="2536050"/>
           </a:xfrm>
           <a:prstGeom prst="rect">
             <a:avLst/>
@@ -18854,7 +18926,7 @@
                 </a:solidFill>
                 <a:latin typeface="Georgia"/>
               </a:rPr>
-              <a:t>Predict: which role will the city head side with?</a:t>
+              <a:t>Predict: which line best answers the monsoon?</a:t>
             </a:r>
           </a:p>
         </p:txBody>
@@ -18889,7 +18961,7 @@
                 </a:solidFill>
                 <a:latin typeface="Calibri"/>
               </a:rPr>
-              <a:t>When the three objections land, whose side is the city head on?</a:t>
+              <a:t>The finance partner says the fall is the monsoon ending. Which line of evidence answers it best?</a:t>
             </a:r>
           </a:p>
         </p:txBody>
@@ -18928,7 +19000,7 @@
                 </a:solidFill>
                 <a:latin typeface="Calibri"/>
               </a:rPr>
-              <a:t>a) The driver-operations lead: "Drivers will log off and supply at peak will fall"</a:t>
+              <a:t>a) Rider requests rose 1.8 percent across the six weeks after the launch, so demand never fell</a:t>
             </a:r>
           </a:p>
           <a:p>
@@ -18944,7 +19016,7 @@
                 </a:solidFill>
                 <a:latin typeface="Calibri"/>
               </a:rPr>
-              <a:t>b) The marketing lead: "The guarantee is on every hoarding; changing it six weeks in looks like bait"</a:t>
+              <a:t>b) With requests back at the before level, the last three weeks still ran at 1.56 trips an hour</a:t>
             </a:r>
           </a:p>
           <a:p>
@@ -18960,7 +19032,7 @@
                 </a:solidFill>
                 <a:latin typeface="Calibri"/>
               </a:rPr>
-              <a:t>c) The finance partner: "The fall in bookings per hour is the monsoon ending"</a:t>
+              <a:t>c) Bookings per active driver-week rose 0.8 percent, so drivers still earned</a:t>
             </a:r>
           </a:p>
           <a:p>
@@ -18976,7 +19048,7 @@
                 </a:solidFill>
                 <a:latin typeface="Calibri"/>
               </a:rPr>
-              <a:t>d) None of them outright, because each objection is partly right</a:t>
+              <a:t>d) The 140 drivers who joined after the launch drove only some weeks</a:t>
             </a:r>
           </a:p>
         </p:txBody>
@@ -19454,7 +19526,7 @@
                 </a:solidFill>
                 <a:latin typeface="Georgia"/>
               </a:rPr>
-              <a:t>Answer: each objection is partly right</a:t>
+              <a:t>Answer: the last three weeks answer the monsoon</a:t>
             </a:r>
           </a:p>
         </p:txBody>
@@ -19503,8 +19575,8 @@
           <p:nvPr/>
         </p:nvGraphicFramePr>
         <p:xfrm>
-          <a:off x="530352" y="1956816"/>
-          <a:ext cx="11130989" cy="2446528"/>
+          <a:off x="530352" y="1931670"/>
+          <a:ext cx="11130989" cy="2688336"/>
         </p:xfrm>
         <a:graphic>
           <a:graphicData uri="http://schemas.openxmlformats.org/drawingml/2006/table">
@@ -19721,7 +19793,7 @@
                   </a:tcPr>
                 </a:tc>
               </a:tr>
-              <a:tr h="611632">
+              <a:tr h="853440">
                 <a:tc>
                   <a:txBody>
                     <a:bodyPr/>
@@ -19756,7 +19828,7 @@
                           </a:solidFill>
                           <a:latin typeface="Calibri"/>
                         </a:rPr>
-                        <a:t>The monsoon ended inside the window, and last year's weeks are not in the data</a:t>
+                        <a:t>The monsoon ended inside the six weeks, and last year's weeks are not in the data</a:t>
                       </a:r>
                     </a:p>
                   </a:txBody>
@@ -19778,7 +19850,7 @@
                           </a:solidFill>
                           <a:latin typeface="Calibri"/>
                         </a:rPr>
-                        <a:t>Rider requests rose 1.8 percent; drivers who joined before the launch fell from 1.90 to 1.58</a:t>
+                        <a:t>In the last three weeks requests were back at the before level and trips per hour still ran at 1.56</a:t>
                       </a:r>
                     </a:p>
                   </a:txBody>
@@ -19801,8 +19873,8 @@
         </p:nvSpPr>
         <p:spPr>
           <a:xfrm>
-            <a:off x="530352" y="4659376"/>
-            <a:ext cx="11130991" cy="807720"/>
+            <a:off x="530352" y="4876038"/>
+            <a:ext cx="11130991" cy="1074420"/>
           </a:xfrm>
           <a:prstGeom prst="roundRect">
             <a:avLst>
@@ -19849,8 +19921,8 @@
         </p:nvSpPr>
         <p:spPr>
           <a:xfrm>
-            <a:off x="676656" y="4787392"/>
-            <a:ext cx="45720" cy="551688"/>
+            <a:off x="676656" y="5004054"/>
+            <a:ext cx="45720" cy="818388"/>
           </a:xfrm>
           <a:prstGeom prst="roundRect">
             <a:avLst>
@@ -19895,8 +19967,8 @@
         </p:nvSpPr>
         <p:spPr>
           <a:xfrm>
-            <a:off x="877824" y="4778248"/>
-            <a:ext cx="10564063" cy="624840"/>
+            <a:off x="877824" y="4994910"/>
+            <a:ext cx="10564063" cy="891540"/>
           </a:xfrm>
           <a:prstGeom prst="rect">
             <a:avLst/>
@@ -19916,7 +19988,7 @@
                 </a:solidFill>
                 <a:latin typeface="Calibri"/>
               </a:rPr>
-              <a:t>The answer is d. </a:t>
+              <a:t>The answer is b. </a:t>
             </a:r>
             <a:r>
               <a:rPr sz="1500" b="0" i="0">
@@ -19925,7 +19997,7 @@
                 </a:solidFill>
                 <a:latin typeface="Calibri"/>
               </a:rPr>
-              <a:t>A defence that sides with no one concedes each true part out loud and answers the rest from a line of evidence.</a:t>
+              <a:t>Weekly requests fell four weeks running from 7 September, so a's six-week average hides a slide; in the last three weeks they sat inside the before window's weekly range, and trips per hour stayed at 1.56. c is the per-driver-week trap, and d explains the denominator, never the fall.</a:t>
             </a:r>
           </a:p>
         </p:txBody>
@@ -22887,7 +22959,7 @@
         </p:nvSpPr>
         <p:spPr>
           <a:xfrm>
-            <a:off x="530352" y="1945386"/>
+            <a:off x="530352" y="1812036"/>
             <a:ext cx="11130991" cy="807720"/>
           </a:xfrm>
           <a:prstGeom prst="roundRect">
@@ -22935,7 +23007,7 @@
         </p:nvSpPr>
         <p:spPr>
           <a:xfrm>
-            <a:off x="676656" y="2073402"/>
+            <a:off x="676656" y="1940052"/>
             <a:ext cx="45720" cy="551688"/>
           </a:xfrm>
           <a:prstGeom prst="roundRect">
@@ -22981,7 +23053,7 @@
         </p:nvSpPr>
         <p:spPr>
           <a:xfrm>
-            <a:off x="877824" y="2064258"/>
+            <a:off x="877824" y="1930908"/>
             <a:ext cx="10564063" cy="624840"/>
           </a:xfrm>
           <a:prstGeom prst="rect">
@@ -23024,7 +23096,7 @@
         </p:nvSpPr>
         <p:spPr>
           <a:xfrm>
-            <a:off x="530352" y="2917698"/>
+            <a:off x="530352" y="2784348"/>
             <a:ext cx="11130991" cy="1074420"/>
           </a:xfrm>
           <a:prstGeom prst="roundRect">
@@ -23072,7 +23144,7 @@
         </p:nvSpPr>
         <p:spPr>
           <a:xfrm>
-            <a:off x="676656" y="3045714"/>
+            <a:off x="676656" y="2912364"/>
             <a:ext cx="45720" cy="818388"/>
           </a:xfrm>
           <a:prstGeom prst="roundRect">
@@ -23118,7 +23190,7 @@
         </p:nvSpPr>
         <p:spPr>
           <a:xfrm>
-            <a:off x="877824" y="3036570"/>
+            <a:off x="877824" y="2903220"/>
             <a:ext cx="10564063" cy="891540"/>
           </a:xfrm>
           <a:prstGeom prst="rect">
@@ -23148,7 +23220,7 @@
                 </a:solidFill>
                 <a:latin typeface="Calibri"/>
               </a:rPr>
-              <a:t>"Three lines of evidence point at the scheme: rider requests rose 1.8 percent, so demand did not fall; the three busiest weeks after the launch still ran at 1.60 trips per online hour; and drivers who joined before the launch fell from 1.90 to 1.58, so the new drivers do not explain it."</a:t>
+              <a:t>"Two lines of evidence point at the scheme: in the last three weeks after the launch, requests were back at the before window's level and trips per online hour still ran at 1.56; and the drivers who were there before the launch fell from 1.90 to 1.58, so the new drivers do not explain it."</a:t>
             </a:r>
           </a:p>
         </p:txBody>
@@ -23161,7 +23233,7 @@
         </p:nvSpPr>
         <p:spPr>
           <a:xfrm>
-            <a:off x="530352" y="4156710"/>
+            <a:off x="530352" y="4023360"/>
             <a:ext cx="11130991" cy="807720"/>
           </a:xfrm>
           <a:prstGeom prst="roundRect">
@@ -23209,7 +23281,7 @@
         </p:nvSpPr>
         <p:spPr>
           <a:xfrm>
-            <a:off x="676656" y="4284726"/>
+            <a:off x="676656" y="4151376"/>
             <a:ext cx="45720" cy="551688"/>
           </a:xfrm>
           <a:prstGeom prst="roundRect">
@@ -23255,7 +23327,7 @@
         </p:nvSpPr>
         <p:spPr>
           <a:xfrm>
-            <a:off x="877824" y="4275582"/>
+            <a:off x="877824" y="4142232"/>
             <a:ext cx="10564063" cy="624840"/>
           </a:xfrm>
           <a:prstGeom prst="rect">
@@ -23285,7 +23357,7 @@
                 </a:solidFill>
                 <a:latin typeface="Calibri"/>
               </a:rPr>
-              <a:t>"You are right that the monsoon ended inside the window, and that last year's weeks are not in the data."</a:t>
+              <a:t>"You are right that the monsoon ended inside the six weeks, and that last year's weeks are not in the data."</a:t>
             </a:r>
           </a:p>
         </p:txBody>
@@ -23298,8 +23370,8 @@
         </p:nvSpPr>
         <p:spPr>
           <a:xfrm>
-            <a:off x="530352" y="5129022"/>
-            <a:ext cx="11130991" cy="807720"/>
+            <a:off x="530352" y="4995672"/>
+            <a:ext cx="11130991" cy="1074420"/>
           </a:xfrm>
           <a:prstGeom prst="roundRect">
             <a:avLst>
@@ -23346,8 +23418,8 @@
         </p:nvSpPr>
         <p:spPr>
           <a:xfrm>
-            <a:off x="676656" y="5257038"/>
-            <a:ext cx="45720" cy="551688"/>
+            <a:off x="676656" y="5123688"/>
+            <a:ext cx="45720" cy="818388"/>
           </a:xfrm>
           <a:prstGeom prst="roundRect">
             <a:avLst>
@@ -23392,8 +23464,8 @@
         </p:nvSpPr>
         <p:spPr>
           <a:xfrm>
-            <a:off x="877824" y="5247894"/>
-            <a:ext cx="10564063" cy="624840"/>
+            <a:off x="877824" y="5114544"/>
+            <a:ext cx="10564063" cy="891540"/>
           </a:xfrm>
           <a:prstGeom prst="rect">
             <a:avLst/>
@@ -23422,7 +23494,7 @@
                 </a:solidFill>
                 <a:latin typeface="Calibri"/>
               </a:rPr>
-              <a:t>"The same six weeks of last year showing a fall of this size, or the test of the redesign showing no change in trips per online hour."</a:t>
+              <a:t>"Last year's same six weeks showing a fall of this size, a city where the rains ended without the scheme showing the same fall, or the test of the redesign showing no change in trips per online hour."</a:t>
             </a:r>
           </a:p>
         </p:txBody>
@@ -24248,7 +24320,7 @@
         <p:spPr>
           <a:xfrm>
             <a:off x="530352" y="3692144"/>
-            <a:ext cx="11130991" cy="807720"/>
+            <a:ext cx="11130991" cy="1074420"/>
           </a:xfrm>
           <a:prstGeom prst="roundRect">
             <a:avLst>
@@ -24296,7 +24368,7 @@
         <p:spPr>
           <a:xfrm>
             <a:off x="676656" y="3820160"/>
-            <a:ext cx="45720" cy="551688"/>
+            <a:ext cx="45720" cy="818388"/>
           </a:xfrm>
           <a:prstGeom prst="roundRect">
             <a:avLst>
@@ -24342,7 +24414,7 @@
         <p:spPr>
           <a:xfrm>
             <a:off x="877824" y="3811016"/>
-            <a:ext cx="10564063" cy="624840"/>
+            <a:ext cx="10564063" cy="891540"/>
           </a:xfrm>
           <a:prstGeom prst="rect">
             <a:avLst/>
@@ -24362,7 +24434,7 @@
                 </a:solidFill>
                 <a:latin typeface="Calibri"/>
               </a:rPr>
-              <a:t>Three rounds of seven minutes. </a:t>
+              <a:t>Three turns of seven minutes. </a:t>
             </a:r>
             <a:r>
               <a:rPr sz="1500" b="0" i="0">
@@ -24371,7 +24443,7 @@
                 </a:solidFill>
                 <a:latin typeface="Calibri"/>
               </a:rPr>
-              <a:t>Rotate seats after each round, so every member of a group presents once, objects once and scores once.</a:t>
+              <a:t>The studio is the morning's practice: build a slide, present it, take an objection, get scored, rebuild. After each turn the seats rotate inside the three, so every member presents once, objects once and scores once.</a:t>
             </a:r>
           </a:p>
         </p:txBody>
@@ -25129,7 +25201,7 @@
         <p:spPr>
           <a:xfrm>
             <a:off x="530352" y="3805936"/>
-            <a:ext cx="11130991" cy="772160"/>
+            <a:ext cx="11130991" cy="1048512"/>
           </a:xfrm>
           <a:prstGeom prst="rect">
             <a:avLst/>
@@ -25181,7 +25253,7 @@
                 </a:solidFill>
                 <a:latin typeface="Calibri"/>
               </a:rPr>
-              <a:t> [F]: a stakeholder's objection is partly right; how do you answer it?</a:t>
+              <a:t> [F], frequent in GCC and product screens: a stakeholder's objection is partly right; how do you answer it?</a:t>
             </a:r>
           </a:p>
         </p:txBody>
@@ -26885,7 +26957,7 @@
                 </a:solidFill>
                 <a:latin typeface="Georgia"/>
               </a:rPr>
-              <a:t>"The scheme is paying for online hours that carry no trips: gross bookings per peak online hour fell from Rs 314 to Rs 260 while the fare held at Rs 165. The monsoon ended inside the window, so part of the fall may be the season. Pay per completed peak trip with an acceptance floor; that returns Rs 58 lakh to Rs 92.7 lakh over six weeks depending on whether half or a fifth of the idle drivers start accepting."</a:t>
+              <a:t>"The scheme is paying for online hours that carry no trips: gross bookings per peak online hour fell from Rs 314 to Rs 260 while the fare held at Rs 165. The monsoon ended inside the six weeks, so part of the fall may be the season. Test paying per completed peak trip with an acceptance floor: city-wide, it saves Rs 58 lakh to Rs 92.7 lakh over six weeks if a half to a fifth of the idle drivers' top-up is still paid."</a:t>
             </a:r>
           </a:p>
         </p:txBody>
@@ -26933,7 +27005,7 @@
                 </a:solidFill>
                 <a:latin typeface="Calibri"/>
               </a:rPr>
-              <a:t> you will also have sized the drivers the evening peak needs, said every assumption aloud, given a range, and checked it against a ratio the case's own data can confirm.</a:t>
+              <a:t> you will also have estimated how many drivers the evening peak needs, said every assumption aloud, given a range, and checked it against the case's own data.</a:t>
             </a:r>
           </a:p>
         </p:txBody>
@@ -27453,7 +27525,7 @@
       </p:sp>
       <p:pic>
         <p:nvPicPr>
-          <p:cNvPr id="9" name="mermaid diagram" descr="afc59ca9f98645d4.png"/>
+          <p:cNvPr id="9" name="mermaid diagram" descr="f1924848a388c978.png"/>
           <p:cNvPicPr>
             <a:picLocks noChangeAspect="1"/>
           </p:cNvPicPr>
@@ -28898,7 +28970,7 @@
                 </a:solidFill>
                 <a:latin typeface="Calibri"/>
               </a:rPr>
-              <a:t>Which two elements of a crowded draft does the claim need?</a:t>
+              <a:t>A second draft argues that riders got little for the Rs 1.9 crore. Which two of its five elements carry that claim?</a:t>
             </a:r>
           </a:p>
         </p:txBody>
@@ -29020,7 +29092,7 @@
                           </a:solidFill>
                           <a:latin typeface="Calibri"/>
                         </a:rPr>
-                        <a:t>The chart of bookings per peak online hour, Rs 314 to Rs 260</a:t>
+                        <a:t>Median rider wait at peak, 4.8 to 4.6 minutes</a:t>
                       </a:r>
                     </a:p>
                   </a:txBody>
@@ -29056,7 +29128,7 @@
                           </a:solidFill>
                           <a:latin typeface="Calibri"/>
                         </a:rPr>
-                        <a:t>A table of acceptance by zone</a:t>
+                        <a:t>Top-up for each extra trip: Rs 2,836, for a trip worth Rs 165</a:t>
                       </a:r>
                     </a:p>
                   </a:txBody>
@@ -30399,7 +30471,7 @@
         <p:spPr>
           <a:xfrm>
             <a:off x="530352" y="1956816"/>
-            <a:ext cx="11130991" cy="1710943"/>
+            <a:ext cx="11130991" cy="1434592"/>
           </a:xfrm>
           <a:prstGeom prst="rect">
             <a:avLst/>
@@ -30424,7 +30496,7 @@
                 </a:solidFill>
                 <a:latin typeface="Calibri"/>
               </a:rPr>
-              <a:t>Each group keeps its slide and swaps seats.</a:t>
+              <a:t>Each group keeps its threes and its rotation.</a:t>
             </a:r>
             <a:r>
               <a:rPr sz="1600" b="0" i="0">
@@ -30433,7 +30505,7 @@
                 </a:solidFill>
                 <a:latin typeface="Calibri"/>
               </a:rPr>
-              <a:t> The round-one presenter now objects, reading the role card that pushed hardest on their own slide; the round-one scorer presents, with the appendix pages built in chapter 3.</a:t>
+              <a:t> Each presenter now shows the slide rebuilt after round one, and answers each objection by naming the appendix page, from the drawer on S27, that holds the detail.</a:t>
             </a:r>
           </a:p>
           <a:p>
@@ -30449,7 +30521,7 @@
                 </a:solidFill>
                 <a:latin typeface="Calibri"/>
               </a:rPr>
-              <a:t>Three rounds of seven minutes, rotating, then eight minutes to rebuild the slide</a:t>
+              <a:t>Three turns of seven minutes, rotating, then eight minutes to rebuild the slide</a:t>
             </a:r>
             <a:r>
               <a:rPr sz="1600" b="0" i="0">
@@ -32226,8 +32298,8 @@
         </p:nvSpPr>
         <p:spPr>
           <a:xfrm>
-            <a:off x="530352" y="1956816"/>
-            <a:ext cx="3588410" cy="2154428"/>
+            <a:off x="530352" y="1894586"/>
+            <a:ext cx="3588410" cy="2017776"/>
           </a:xfrm>
           <a:prstGeom prst="roundRect">
             <a:avLst>
@@ -32280,7 +32352,7 @@
         </p:nvSpPr>
         <p:spPr>
           <a:xfrm>
-            <a:off x="731519" y="2157984"/>
+            <a:off x="731519" y="2095754"/>
             <a:ext cx="457200" cy="457200"/>
           </a:xfrm>
           <a:prstGeom prst="ellipse">
@@ -32332,7 +32404,7 @@
         </p:blipFill>
         <p:spPr>
           <a:xfrm>
-            <a:off x="841247" y="2267712"/>
+            <a:off x="841247" y="2205482"/>
             <a:ext cx="237744" cy="237744"/>
           </a:xfrm>
           <a:prstGeom prst="rect">
@@ -32348,7 +32420,7 @@
         </p:nvSpPr>
         <p:spPr>
           <a:xfrm>
-            <a:off x="731519" y="2724912"/>
+            <a:off x="731519" y="2662682"/>
             <a:ext cx="3186074" cy="160401"/>
           </a:xfrm>
           <a:prstGeom prst="rect">
@@ -32383,8 +32455,8 @@
         </p:nvSpPr>
         <p:spPr>
           <a:xfrm>
-            <a:off x="731519" y="2962656"/>
-            <a:ext cx="3186074" cy="267716"/>
+            <a:off x="731519" y="2900426"/>
+            <a:ext cx="3186074" cy="234696"/>
           </a:xfrm>
           <a:prstGeom prst="rect">
             <a:avLst/>
@@ -32399,7 +32471,7 @@
           <a:p>
             <a:pPr algn="l"/>
             <a:r>
-              <a:rPr sz="1400" b="1" i="0">
+              <a:rPr sz="1200" b="1" i="0">
                 <a:solidFill>
                   <a:srgbClr val="1A0F5C"/>
                 </a:solidFill>
@@ -32418,8 +32490,8 @@
         </p:nvSpPr>
         <p:spPr>
           <a:xfrm>
-            <a:off x="731519" y="3303524"/>
-            <a:ext cx="3186074" cy="581406"/>
+            <a:off x="731519" y="3208274"/>
+            <a:ext cx="3186074" cy="482346"/>
           </a:xfrm>
           <a:prstGeom prst="rect">
             <a:avLst/>
@@ -32434,7 +32506,7 @@
           <a:p>
             <a:pPr algn="l"/>
             <a:r>
-              <a:rPr sz="1100" b="0" i="0">
+              <a:rPr sz="900" b="0" i="0">
                 <a:solidFill>
                   <a:srgbClr val="6B6690"/>
                 </a:solidFill>
@@ -32453,8 +32525,8 @@
         </p:nvSpPr>
         <p:spPr>
           <a:xfrm>
-            <a:off x="4301642" y="1956816"/>
-            <a:ext cx="3588410" cy="2154428"/>
+            <a:off x="4301642" y="1894586"/>
+            <a:ext cx="3588410" cy="2017776"/>
           </a:xfrm>
           <a:prstGeom prst="roundRect">
             <a:avLst>
@@ -32507,7 +32579,7 @@
         </p:nvSpPr>
         <p:spPr>
           <a:xfrm>
-            <a:off x="4502810" y="2157984"/>
+            <a:off x="4502810" y="2095754"/>
             <a:ext cx="457200" cy="457200"/>
           </a:xfrm>
           <a:prstGeom prst="ellipse">
@@ -32559,7 +32631,7 @@
         </p:blipFill>
         <p:spPr>
           <a:xfrm>
-            <a:off x="4612538" y="2267712"/>
+            <a:off x="4612538" y="2205482"/>
             <a:ext cx="237744" cy="237744"/>
           </a:xfrm>
           <a:prstGeom prst="rect">
@@ -32575,7 +32647,7 @@
         </p:nvSpPr>
         <p:spPr>
           <a:xfrm>
-            <a:off x="4502810" y="2724912"/>
+            <a:off x="4502810" y="2662682"/>
             <a:ext cx="3186074" cy="160401"/>
           </a:xfrm>
           <a:prstGeom prst="rect">
@@ -32610,8 +32682,8 @@
         </p:nvSpPr>
         <p:spPr>
           <a:xfrm>
-            <a:off x="4502810" y="2962656"/>
-            <a:ext cx="3186074" cy="267716"/>
+            <a:off x="4502810" y="2900426"/>
+            <a:ext cx="3186074" cy="234696"/>
           </a:xfrm>
           <a:prstGeom prst="rect">
             <a:avLst/>
@@ -32626,7 +32698,7 @@
           <a:p>
             <a:pPr algn="l"/>
             <a:r>
-              <a:rPr sz="1400" b="1" i="0">
+              <a:rPr sz="1200" b="1" i="0">
                 <a:solidFill>
                   <a:srgbClr val="1A0F5C"/>
                 </a:solidFill>
@@ -32645,8 +32717,8 @@
         </p:nvSpPr>
         <p:spPr>
           <a:xfrm>
-            <a:off x="4502810" y="3303524"/>
-            <a:ext cx="3186074" cy="581406"/>
+            <a:off x="4502810" y="3208274"/>
+            <a:ext cx="3186074" cy="482346"/>
           </a:xfrm>
           <a:prstGeom prst="rect">
             <a:avLst/>
@@ -32661,13 +32733,13 @@
           <a:p>
             <a:pPr algn="l"/>
             <a:r>
-              <a:rPr sz="1100" b="0" i="0">
+              <a:rPr sz="900" b="0" i="0">
                 <a:solidFill>
                   <a:srgbClr val="6B6690"/>
                 </a:solidFill>
                 <a:latin typeface="Calibri"/>
               </a:rPr>
-              <a:t>"Rs 300 an hour, guaranteed" now carries a condition: the floor holds for drivers who accept</a:t>
+              <a:t>"Rs 300 an hour, guaranteed" now carries a condition: the Rs 300 floor holds only for drivers who accept most offers</a:t>
             </a:r>
           </a:p>
         </p:txBody>
@@ -32680,8 +32752,8 @@
         </p:nvSpPr>
         <p:spPr>
           <a:xfrm>
-            <a:off x="8072932" y="1956816"/>
-            <a:ext cx="3588410" cy="2154428"/>
+            <a:off x="8072932" y="1894586"/>
+            <a:ext cx="3588410" cy="2017776"/>
           </a:xfrm>
           <a:prstGeom prst="roundRect">
             <a:avLst>
@@ -32734,7 +32806,7 @@
         </p:nvSpPr>
         <p:spPr>
           <a:xfrm>
-            <a:off x="8274100" y="2157984"/>
+            <a:off x="8274100" y="2095754"/>
             <a:ext cx="457200" cy="457200"/>
           </a:xfrm>
           <a:prstGeom prst="ellipse">
@@ -32786,7 +32858,7 @@
         </p:blipFill>
         <p:spPr>
           <a:xfrm>
-            <a:off x="8383828" y="2267712"/>
+            <a:off x="8383828" y="2205482"/>
             <a:ext cx="237744" cy="237744"/>
           </a:xfrm>
           <a:prstGeom prst="rect">
@@ -32802,7 +32874,7 @@
         </p:nvSpPr>
         <p:spPr>
           <a:xfrm>
-            <a:off x="8274100" y="2724912"/>
+            <a:off x="8274100" y="2662682"/>
             <a:ext cx="3186074" cy="160401"/>
           </a:xfrm>
           <a:prstGeom prst="rect">
@@ -32837,8 +32909,8 @@
         </p:nvSpPr>
         <p:spPr>
           <a:xfrm>
-            <a:off x="8274100" y="2962656"/>
-            <a:ext cx="3186074" cy="267716"/>
+            <a:off x="8274100" y="2900426"/>
+            <a:ext cx="3186074" cy="234696"/>
           </a:xfrm>
           <a:prstGeom prst="rect">
             <a:avLst/>
@@ -32853,7 +32925,7 @@
           <a:p>
             <a:pPr algn="l"/>
             <a:r>
-              <a:rPr sz="1400" b="1" i="0">
+              <a:rPr sz="1200" b="1" i="0">
                 <a:solidFill>
                   <a:srgbClr val="1A0F5C"/>
                 </a:solidFill>
@@ -32872,8 +32944,8 @@
         </p:nvSpPr>
         <p:spPr>
           <a:xfrm>
-            <a:off x="8274100" y="3303524"/>
-            <a:ext cx="3186074" cy="581406"/>
+            <a:off x="8274100" y="3208274"/>
+            <a:ext cx="3186074" cy="333756"/>
           </a:xfrm>
           <a:prstGeom prst="rect">
             <a:avLst/>
@@ -32888,7 +32960,7 @@
           <a:p>
             <a:pPr algn="l"/>
             <a:r>
-              <a:rPr sz="1100" b="0" i="0">
+              <a:rPr sz="900" b="0" i="0">
                 <a:solidFill>
                   <a:srgbClr val="6B6690"/>
                 </a:solidFill>
@@ -32907,8 +32979,8 @@
         </p:nvSpPr>
         <p:spPr>
           <a:xfrm>
-            <a:off x="530352" y="4294124"/>
-            <a:ext cx="11130991" cy="807720"/>
+            <a:off x="530352" y="4095242"/>
+            <a:ext cx="11130991" cy="1892299"/>
           </a:xfrm>
           <a:prstGeom prst="roundRect">
             <a:avLst>
@@ -32955,8 +33027,8 @@
         </p:nvSpPr>
         <p:spPr>
           <a:xfrm>
-            <a:off x="676656" y="4422140"/>
-            <a:ext cx="45720" cy="551688"/>
+            <a:off x="676656" y="4223258"/>
+            <a:ext cx="45720" cy="1636267"/>
           </a:xfrm>
           <a:prstGeom prst="roundRect">
             <a:avLst>
@@ -33001,8 +33073,8 @@
         </p:nvSpPr>
         <p:spPr>
           <a:xfrm>
-            <a:off x="877824" y="4412996"/>
-            <a:ext cx="10564063" cy="624840"/>
+            <a:off x="877824" y="4214114"/>
+            <a:ext cx="10564063" cy="1709419"/>
           </a:xfrm>
           <a:prstGeom prst="rect">
             <a:avLst/>
@@ -33016,22 +33088,112 @@
           <a:lstStyle/>
           <a:p>
             <a:r>
-              <a:rPr sz="1500" b="1">
+              <a:rPr sz="1300" b="1">
                 <a:solidFill>
                   <a:srgbClr val="5B3FD6"/>
                 </a:solidFill>
                 <a:latin typeface="Calibri"/>
               </a:rPr>
-              <a:t>Monday's definition, in one line. </a:t>
-            </a:r>
-            <a:r>
-              <a:rPr sz="1500" b="0" i="0">
+              <a:t>The scheme now. </a:t>
+            </a:r>
+            <a:r>
+              <a:rPr sz="1300" b="0" i="0">
                 <a:solidFill>
                   <a:srgbClr val="1A1440"/>
                 </a:solidFill>
                 <a:latin typeface="Calibri"/>
               </a:rPr>
-              <a:t>The scheme pays for completed peak trips per enrolled driver per week, with three guardrails: the acceptance share, the median rider wait at peak, and top-up per completed trip.</a:t>
+              <a:t>An enrolled driver online through a whole peak window (two three-hour windows a day) is guaranteed Rs 300 per peak online hour, the floor; when the driver's trip earnings fall short, Uber pays the gap as a </a:t>
+            </a:r>
+            <a:r>
+              <a:rPr sz="1300" b="1" i="0">
+                <a:solidFill>
+                  <a:srgbClr val="1A1440"/>
+                </a:solidFill>
+                <a:latin typeface="Calibri"/>
+              </a:rPr>
+              <a:t>top-up</a:t>
+            </a:r>
+            <a:r>
+              <a:rPr sz="1300" b="0" i="0">
+                <a:solidFill>
+                  <a:srgbClr val="1A1440"/>
+                </a:solidFill>
+                <a:latin typeface="Calibri"/>
+              </a:rPr>
+              <a:t>. </a:t>
+            </a:r>
+            <a:r>
+              <a:rPr sz="1300" b="1" i="0">
+                <a:solidFill>
+                  <a:srgbClr val="1A1440"/>
+                </a:solidFill>
+                <a:latin typeface="Calibri"/>
+              </a:rPr>
+              <a:t>Monday's redesign,</a:t>
+            </a:r>
+            <a:r>
+              <a:rPr sz="1300" b="0" i="0">
+                <a:solidFill>
+                  <a:srgbClr val="1A1440"/>
+                </a:solidFill>
+                <a:latin typeface="Calibri"/>
+              </a:rPr>
+              <a:t> as a driver hears it: "The floor now pays for trips you complete, if you say yes to most offers." Saying yes to at least half the requests offered is the </a:t>
+            </a:r>
+            <a:r>
+              <a:rPr sz="1300" b="1" i="0">
+                <a:solidFill>
+                  <a:srgbClr val="1A1440"/>
+                </a:solidFill>
+                <a:latin typeface="Calibri"/>
+              </a:rPr>
+              <a:t>acceptance floor</a:t>
+            </a:r>
+            <a:r>
+              <a:rPr sz="1300" b="0" i="0">
+                <a:solidFill>
+                  <a:srgbClr val="1A1440"/>
+                </a:solidFill>
+                <a:latin typeface="Calibri"/>
+              </a:rPr>
+              <a:t>. Three </a:t>
+            </a:r>
+            <a:r>
+              <a:rPr sz="1300" b="1" i="0">
+                <a:solidFill>
+                  <a:srgbClr val="1A1440"/>
+                </a:solidFill>
+                <a:latin typeface="Calibri"/>
+              </a:rPr>
+              <a:t>guardrails</a:t>
+            </a:r>
+            <a:r>
+              <a:rPr sz="1300" b="0" i="0">
+                <a:solidFill>
+                  <a:srgbClr val="1A1440"/>
+                </a:solidFill>
+                <a:latin typeface="Calibri"/>
+              </a:rPr>
+              <a:t>, numbers that must not get worse while trips rise, watch it: the acceptance share, the median rider wait at peak and top-up per completed trip. </a:t>
+            </a:r>
+            <a:r>
+              <a:rPr sz="1300" b="1" i="0">
+                <a:solidFill>
+                  <a:srgbClr val="1A1440"/>
+                </a:solidFill>
+                <a:latin typeface="Calibri"/>
+              </a:rPr>
+              <a:t>The saving:</a:t>
+            </a:r>
+            <a:r>
+              <a:rPr sz="1300" b="0" i="0">
+                <a:solidFill>
+                  <a:srgbClr val="1A1440"/>
+                </a:solidFill>
+                <a:latin typeface="Calibri"/>
+              </a:rPr>
+              <a:t> Rs 1.16 crore of top-up (115.9 lakh) went to driver-weeks that accepted under half their offers; if half of it is still paid, 115.9 / 2 = Rs 58 lakh is saved over six weeks, and if a fifth is, 115.9 x 4/5 = Rs 92.7 lakh.</a:t>
             </a:r>
           </a:p>
         </p:txBody>
@@ -34055,7 +34217,7 @@
                 </a:solidFill>
                 <a:latin typeface="Calibri"/>
               </a:rPr>
-              <a:t>Which title tells the city head what to do on the first read?</a:t>
+              <a:t>Finance has a slide on the top-up. Which title tells the city head what to do on the first read?</a:t>
             </a:r>
           </a:p>
         </p:txBody>
@@ -34094,7 +34256,7 @@
                 </a:solidFill>
                 <a:latin typeface="Calibri"/>
               </a:rPr>
-              <a:t>a) Peak guarantee: six-week review</a:t>
+              <a:t>a) Top-up review, six weeks</a:t>
             </a:r>
           </a:p>
           <a:p>
@@ -34110,7 +34272,7 @@
                 </a:solidFill>
                 <a:latin typeface="Calibri"/>
               </a:rPr>
-              <a:t>b) Online hours up 24 percent, trips up 3 percent</a:t>
+              <a:t>b) Top-up Rs 1.9 crore, 61 percent of it to drivers accepting under half their offers</a:t>
             </a:r>
           </a:p>
           <a:p>
@@ -34126,7 +34288,7 @@
                 </a:solidFill>
                 <a:latin typeface="Calibri"/>
               </a:rPr>
-              <a:t>c) The scheme pays for idle hours: pay per completed trip</a:t>
+              <a:t>c) Most of the top-up pays drivers who decline offers: add an acceptance floor</a:t>
             </a:r>
           </a:p>
           <a:p>
@@ -34142,7 +34304,7 @@
                 </a:solidFill>
                 <a:latin typeface="Calibri"/>
               </a:rPr>
-              <a:t>d) Hyderabad operations update, October</a:t>
+              <a:t>d) Driver payments update, October</a:t>
             </a:r>
           </a:p>
           <a:p>
@@ -34856,7 +35018,7 @@
                 </a:solidFill>
                 <a:latin typeface="Calibri"/>
               </a:rPr>
-              <a:t>a and d name a topic. b reports two numbers and leaves the reader to find the point, and it is Monday's trap resold: online hours up 24 percent is the number that rose while riders were served no better. Barbara Minto's Pyramid Principle puts the answer first and the support beneath it.</a:t>
+              <a:t>a and d name a topic. b reports two true numbers and leaves the reader to find the point. c says what is true and what to do about it, so a reader can act on the title alone. Barbara Minto's Pyramid Principle, a book on business writing, puts the single point first and the support beneath it.</a:t>
             </a:r>
           </a:p>
         </p:txBody>
@@ -35376,7 +35538,7 @@
       </p:sp>
       <p:pic>
         <p:nvPicPr>
-          <p:cNvPr id="9" name="mermaid diagram" descr="cbf314da76da5af4.png"/>
+          <p:cNvPr id="9" name="mermaid diagram" descr="f2908926c4d4ae59.png"/>
           <p:cNvPicPr>
             <a:picLocks noChangeAspect="1"/>
           </p:cNvPicPr>
@@ -35391,7 +35553,7 @@
         <p:spPr>
           <a:xfrm>
             <a:off x="530352" y="1956816"/>
-            <a:ext cx="11130991" cy="1628203"/>
+            <a:ext cx="11130991" cy="1805825"/>
           </a:xfrm>
           <a:prstGeom prst="rect">
             <a:avLst/>
@@ -35406,8 +35568,8 @@
         </p:nvSpPr>
         <p:spPr>
           <a:xfrm>
-            <a:off x="530352" y="3731323"/>
-            <a:ext cx="11130991" cy="807720"/>
+            <a:off x="530352" y="3908945"/>
+            <a:ext cx="11130991" cy="1074420"/>
           </a:xfrm>
           <a:prstGeom prst="roundRect">
             <a:avLst>
@@ -35454,8 +35616,8 @@
         </p:nvSpPr>
         <p:spPr>
           <a:xfrm>
-            <a:off x="676656" y="3859339"/>
-            <a:ext cx="45720" cy="551688"/>
+            <a:off x="676656" y="4036961"/>
+            <a:ext cx="45720" cy="818388"/>
           </a:xfrm>
           <a:prstGeom prst="roundRect">
             <a:avLst>
@@ -35500,8 +35662,8 @@
         </p:nvSpPr>
         <p:spPr>
           <a:xfrm>
-            <a:off x="877824" y="3850195"/>
-            <a:ext cx="10564063" cy="624840"/>
+            <a:off x="877824" y="4027817"/>
+            <a:ext cx="10564063" cy="891540"/>
           </a:xfrm>
           <a:prstGeom prst="rect">
             <a:avLst/>
@@ -35530,7 +35692,7 @@
                 </a:solidFill>
                 <a:latin typeface="Calibri"/>
               </a:rPr>
-              <a:t>A slide that opens on its evidence has already given away its title, and a slide whose caveat sits off the page invites its owner to call it dishonest.</a:t>
+              <a:t>Put the claim first: a slide that opens on its evidence makes the reader guess the point, and a caveat hidden in the appendix hands the person it affects a reason to call the slide dishonest.</a:t>
             </a:r>
           </a:p>
         </p:txBody>

--- a/content/W04/D2/slides/C2_W04_D02_half1_STUDENT.pptx
+++ b/content/W04/D2/slides/C2_W04_D02_half1_STUDENT.pptx
@@ -2991,7 +2991,22 @@
           <a:lstStyle/>
           <a:p>
             <a:r>
-              <a:t>LIVE, 10 minutes. Cards hidden first. Groups of three spend 6 minutes listing what each role loses;</a:t>
+              <a:t>LIVE, 10 minutes. If a learner asks how a Rs 300 floor costs Rs 1.9 crore when an hour brought in Rs 260</a:t>
+            </a:r>
+          </a:p>
+          <a:p>
+            <a:r>
+              <a:t>of fares: the floor is checked driver by driver, week by week, on the driver's own trip earnings, and</a:t>
+            </a:r>
+          </a:p>
+          <a:p>
+            <a:r>
+              <a:t>the idle tail's 42,000 hours carried Rs 1.16 crore of it, about Rs 276 an hour. Cards hidden first.</a:t>
+            </a:r>
+          </a:p>
+          <a:p>
+            <a:r>
+              <a:t>Groups of three spend 6 minutes listing what each role loses;</a:t>
             </a:r>
           </a:p>
           <a:p>
@@ -7855,7 +7870,7 @@
         <p:spPr>
           <a:xfrm>
             <a:off x="530352" y="1956816"/>
-            <a:ext cx="11130991" cy="2316480"/>
+            <a:ext cx="11130991" cy="2592832"/>
           </a:xfrm>
           <a:prstGeom prst="rect">
             <a:avLst/>
@@ -7980,7 +7995,7 @@
                 </a:solidFill>
                 <a:latin typeface="Calibri"/>
               </a:rPr>
-              <a:t> means a driver-week that accepted fewer than half the requests offered.</a:t>
+              <a:t> means a driver-week that accepted fewer than half the requests offered: after the launch, these are the idle tail's weeks.</a:t>
             </a:r>
           </a:p>
         </p:txBody>

--- a/content/W04/D2/slides/C2_W04_D02_half1_STUDENT.pptx
+++ b/content/W04/D2/slides/C2_W04_D02_half1_STUDENT.pptx
@@ -1671,7 +1671,7 @@
           </a:p>
           <a:p>
             <a:r>
-              <a:t>votes on a, since it is the number everyone quotes.</a:t>
+              <a:t>votes on c, since the monsoon sounds like the safest explanation.</a:t>
             </a:r>
           </a:p>
           <a:p>
@@ -18941,7 +18941,7 @@
                 </a:solidFill>
                 <a:latin typeface="Georgia"/>
               </a:rPr>
-              <a:t>Predict: which line best answers the monsoon?</a:t>
+              <a:t>Predict: which role will the city head side with?</a:t>
             </a:r>
           </a:p>
         </p:txBody>
@@ -18976,7 +18976,7 @@
                 </a:solidFill>
                 <a:latin typeface="Calibri"/>
               </a:rPr>
-              <a:t>The finance partner says the fall is the monsoon ending. Which line of evidence answers it best?</a:t>
+              <a:t>When the three objections land, whose side is the city head on?</a:t>
             </a:r>
           </a:p>
         </p:txBody>
@@ -19015,7 +19015,7 @@
                 </a:solidFill>
                 <a:latin typeface="Calibri"/>
               </a:rPr>
-              <a:t>a) Rider requests rose 1.8 percent across the six weeks after the launch, so demand never fell</a:t>
+              <a:t>a) The driver-operations lead: "Drivers will log off and supply at peak will fall"</a:t>
             </a:r>
           </a:p>
           <a:p>
@@ -19031,7 +19031,7 @@
                 </a:solidFill>
                 <a:latin typeface="Calibri"/>
               </a:rPr>
-              <a:t>b) With requests back at the before level, the last three weeks still ran at 1.56 trips an hour</a:t>
+              <a:t>b) The marketing lead: "The guarantee is on every hoarding; changing it six weeks in looks like bait"</a:t>
             </a:r>
           </a:p>
           <a:p>
@@ -19047,7 +19047,7 @@
                 </a:solidFill>
                 <a:latin typeface="Calibri"/>
               </a:rPr>
-              <a:t>c) Bookings per active driver-week rose 0.8 percent, so drivers still earned</a:t>
+              <a:t>c) The finance partner: "The fall in bookings per hour is the monsoon ending"</a:t>
             </a:r>
           </a:p>
           <a:p>
@@ -19063,7 +19063,7 @@
                 </a:solidFill>
                 <a:latin typeface="Calibri"/>
               </a:rPr>
-              <a:t>d) The 140 drivers who joined after the launch drove only some weeks</a:t>
+              <a:t>d) None of them outright, because each objection is partly right</a:t>
             </a:r>
           </a:p>
         </p:txBody>
@@ -19541,7 +19541,7 @@
                 </a:solidFill>
                 <a:latin typeface="Georgia"/>
               </a:rPr>
-              <a:t>Answer: the last three weeks answer the monsoon</a:t>
+              <a:t>Answer: each objection is partly right</a:t>
             </a:r>
           </a:p>
         </p:txBody>
@@ -20003,7 +20003,7 @@
                 </a:solidFill>
                 <a:latin typeface="Calibri"/>
               </a:rPr>
-              <a:t>The answer is b. </a:t>
+              <a:t>The answer is d. </a:t>
             </a:r>
             <a:r>
               <a:rPr sz="1500" b="0" i="0">
@@ -20012,7 +20012,7 @@
                 </a:solidFill>
                 <a:latin typeface="Calibri"/>
               </a:rPr>
-              <a:t>Weekly requests fell four weeks running from 7 September, so a's six-week average hides a slide; in the last three weeks they sat inside the before window's weekly range, and trips per hour stayed at 1.56. c is the per-driver-week trap, and d explains the denominator, never the fall.</a:t>
+              <a:t>A defence that sides with no one concedes each true part out loud and answers the rest from a line of evidence. Finance's row is the hardest: weekly requests fell four weeks running from 7 September, so the six-week rise of 1.8 percent hides a slide; the last three weeks answer it.</a:t>
             </a:r>
           </a:p>
         </p:txBody>

--- a/content/W04/D2/slides/C2_W04_D02_half1_STUDENT.pptx
+++ b/content/W04/D2/slides/C2_W04_D02_half1_STUDENT.pptx
@@ -656,6 +656,11 @@
           </a:p>
           <a:p>
             <a:r>
+              <a:t>Explorer scene T1 stays on slide A's nine numbers until every letter is in; nothing is unticked yet.</a:t>
+            </a:r>
+          </a:p>
+          <a:p>
+            <a:r>
               <a:t>Transition: the rebuild.</a:t>
             </a:r>
           </a:p>
@@ -746,7 +751,12 @@
           </a:p>
           <a:p>
             <a:r>
-              <a:t>the bar pair, is the evidence.</a:t>
+              <a:t>the bar pair, is the evidence. In explorer scene T1, untick the seven numbers that leave, one at a time,</a:t>
+            </a:r>
+          </a:p>
+          <a:p>
+            <a:r>
+              <a:t>as each part is pointed at.</a:t>
             </a:r>
           </a:p>
           <a:p>
@@ -1097,6 +1107,11 @@
           <a:p>
             <a:r>
               <a:t>Each learner writes a letter. Expect votes on a, since new drivers are the obvious change.</a:t>
+            </a:r>
+          </a:p>
+          <a:p>
+            <a:r>
+              <a:t>Explorer scene T2, the denominator picker, stays closed until every letter is written; it opens on S15.</a:t>
             </a:r>
           </a:p>
           <a:p>
@@ -6723,7 +6738,7 @@
                 </a:solidFill>
                 <a:latin typeface="Calibri"/>
               </a:rPr>
-              <a:t> Thursday's city review gets one slide, five minutes, and three people who each lose under it. Gross bookings are what riders paid; an active driver-week is one driver with a row that week.</a:t>
+              <a:t> Thursday's city review gets one slide, five minutes, and three people who each lose under the redesign. Gross bookings are what riders paid; an active driver-week is one driver with a row that week.</a:t>
             </a:r>
           </a:p>
         </p:txBody>
@@ -7245,7 +7260,7 @@
                 </a:solidFill>
                 <a:latin typeface="Calibri"/>
               </a:rPr>
-              <a:t> Drivers online at the three-hour weekday evening peak for a median wait under five minutes, in fifteen minutes. </a:t>
+              <a:t> Estimate, in fifteen minutes, how many drivers must be online at the three-hour weekday evening peak for a median wait under five minutes. </a:t>
             </a:r>
             <a:r>
               <a:rPr sz="1300" b="1" i="0">
@@ -8704,7 +8719,7 @@
                 </a:solidFill>
                 <a:latin typeface="Calibri"/>
               </a:rPr>
-              <a:t>Trips per online hour falling at a flat fare is bookings per online hour falling, Rs 314 to Rs 260: that is the chart. The 61 percent, the one number beside it, says where the top-up went. Option a is Monday's trap resold: online hours rose 24 percent while riders barely gained.</a:t>
+              <a:t>At a flat fare, fewer trips per online hour means lower bookings per online hour, Rs 314 to Rs 260, and that fall is the chart. The 61 percent, the one number beside it, says where the top-up went. Option a is Monday's trap resold: online hours rose 24 percent while riders barely gained.</a:t>
             </a:r>
           </a:p>
         </p:txBody>
@@ -14041,7 +14056,7 @@
                 </a:solidFill>
                 <a:latin typeface="Calibri"/>
               </a:rPr>
-              <a:t>On the six drivers per driver-week fell 23 percent; on the city it rose 0.8 percent. Why?</a:t>
+              <a:t>On the six drivers, rupees per driver-week fell 23 percent; city-wide, it rose 0.8 percent. Why?</a:t>
             </a:r>
           </a:p>
         </p:txBody>
@@ -14089,7 +14104,7 @@
                 </a:solidFill>
                 <a:latin typeface="Calibri"/>
               </a:rPr>
-              <a:t> Rs 1,800 on Monday from 20 rides in 9 hours, and Rs 1,800 on Tuesday from 18 rides in 12 hours: per day flat, per ride up from Rs 90 to Rs 100, per hour down from Rs 200 to Rs 150. The denominator picks the direction.</a:t>
+              <a:t> The driver earns Rs 1,800 on Monday from 20 rides in 9 hours and Rs 1,800 on Tuesday from 18 rides in 12 hours, so the denominator picks the direction: per day is flat, per ride rises from Rs 90 to Rs 100 and per hour falls from Rs 200 to Rs 150.</a:t>
             </a:r>
           </a:p>
           <a:p>
@@ -14666,7 +14681,7 @@
                 </a:solidFill>
                 <a:latin typeface="Calibri"/>
               </a:rPr>
-              <a:t>How can per driver-week rise while per hour falls?</a:t>
+              <a:t>How can rupees per driver-week rise while rupees per hour fall?</a:t>
             </a:r>
           </a:p>
         </p:txBody>
@@ -15649,7 +15664,7 @@
                 </a:solidFill>
                 <a:latin typeface="Calibri"/>
               </a:rPr>
-              <a:t>Bookings rose 3.0 percent and active driver-weeks 2.2 percent (6,360 to 6,500), so the ratio rose 0.8 percent (1.030 / 1.022 = 1.008). The rise was bought with hours: 21 percent more online hours a driver-week for 17 percent less per hour. The 140 drivers who joined after the launch drove about one week each, at Rs 4,314 a driver-week, so they pulled the read down; the drivers there before the launch rose 1.4 percent.</a:t>
+              <a:t>Bookings rose 3.0 percent and active driver-weeks 2.2 percent (6,360 to 6,500), so the ratio rose 0.8 percent (1.030 / 1.022 = 1.008). The rise was bought with hours: 21 percent more online hours a driver-week for 17 percent less per hour. The 140 drivers who joined after the launch drove about one week each, at Rs 4,314 a driver-week, so they pulled the read down; for the drivers there before the launch, it rose 1.4 percent.</a:t>
             </a:r>
           </a:p>
         </p:txBody>
@@ -15663,7 +15678,7 @@
         <p:spPr>
           <a:xfrm>
             <a:off x="530352" y="4968240"/>
-            <a:ext cx="11130991" cy="541020"/>
+            <a:ext cx="11130991" cy="807720"/>
           </a:xfrm>
           <a:prstGeom prst="roundRect">
             <a:avLst>
@@ -15711,7 +15726,7 @@
         <p:spPr>
           <a:xfrm>
             <a:off x="676656" y="5096256"/>
-            <a:ext cx="45720" cy="284988"/>
+            <a:ext cx="45720" cy="551688"/>
           </a:xfrm>
           <a:prstGeom prst="roundRect">
             <a:avLst>
@@ -15757,7 +15772,7 @@
         <p:spPr>
           <a:xfrm>
             <a:off x="877824" y="5087112"/>
-            <a:ext cx="10564063" cy="358140"/>
+            <a:ext cx="10564063" cy="624840"/>
           </a:xfrm>
           <a:prstGeom prst="rect">
             <a:avLst/>
@@ -15786,7 +15801,7 @@
                 </a:solidFill>
                 <a:latin typeface="Calibri"/>
               </a:rPr>
-              <a:t>The slide names the denominator the scheme pays for, the peak online hour, and says it aloud.</a:t>
+              <a:t>The slide names the denominator the scheme pays for, the peak online hour, and the presenter says it aloud.</a:t>
             </a:r>
           </a:p>
         </p:txBody>
@@ -17415,7 +17430,7 @@
                 </a:solidFill>
                 <a:latin typeface="Calibri"/>
               </a:rPr>
-              <a:t> [S], a staple asked everywhere in this programme's interview tags: present a recommendation to a non-technical stakeholder in two minutes, opening on that sentence.</a:t>
+              <a:t> [S], this programme's tag for a staple asked everywhere: present a recommendation to a non-technical stakeholder in two minutes, opening on that sentence.</a:t>
             </a:r>
           </a:p>
         </p:txBody>
@@ -20012,7 +20027,7 @@
                 </a:solidFill>
                 <a:latin typeface="Calibri"/>
               </a:rPr>
-              <a:t>A defence that sides with no one concedes each true part out loud and answers the rest from a line of evidence. Finance's row is the hardest: weekly requests fell four weeks running from 7 September, so the six-week rise of 1.8 percent hides a slide; the last three weeks answer it.</a:t>
+              <a:t>A defence that sides with no one concedes each true part out loud and answers the rest from a line of evidence. Finance's row is the hardest: weekly requests fell four weeks running from 7 September, so the six-week rise of 1.8 percent hides that decline; the last three weeks answer it.</a:t>
             </a:r>
           </a:p>
         </p:txBody>
@@ -30536,7 +30551,7 @@
                 </a:solidFill>
                 <a:latin typeface="Calibri"/>
               </a:rPr>
-              <a:t>Three turns of seven minutes, rotating, then eight minutes to rebuild the slide</a:t>
+              <a:t>The seats rotate through three turns of seven minutes, and then everyone has eight minutes to rebuild their slide</a:t>
             </a:r>
             <a:r>
               <a:rPr sz="1600" b="0" i="0">
@@ -35577,67 +35592,65 @@
       </p:pic>
       <p:sp>
         <p:nvSpPr>
-          <p:cNvPr id="10" name="Rounded Rectangle 9"/>
+          <p:cNvPr id="10" name="TextBox 9"/>
+          <p:cNvSpPr txBox="1"/>
+          <p:nvPr/>
+        </p:nvSpPr>
+        <p:spPr>
+          <a:xfrm>
+            <a:off x="530352" y="3908945"/>
+            <a:ext cx="11130991" cy="1048512"/>
+          </a:xfrm>
+          <a:prstGeom prst="rect">
+            <a:avLst/>
+          </a:prstGeom>
+          <a:noFill/>
+        </p:spPr>
+        <p:txBody>
+          <a:bodyPr wrap="square" anchor="t" lIns="0" rIns="0" tIns="0" bIns="0">
+            <a:spAutoFit/>
+          </a:bodyPr>
+          <a:lstStyle/>
+          <a:p>
+            <a:pPr>
+              <a:spcAft>
+                <a:spcPts val="800"/>
+              </a:spcAft>
+            </a:pPr>
+            <a:r>
+              <a:rPr sz="1600" b="1" i="0">
+                <a:solidFill>
+                  <a:srgbClr val="1A1440"/>
+                </a:solidFill>
+                <a:latin typeface="Calibri"/>
+              </a:rPr>
+              <a:t>Put the claim first and keep the caveat in sight.</a:t>
+            </a:r>
+            <a:r>
+              <a:rPr sz="1600" b="0" i="0">
+                <a:solidFill>
+                  <a:srgbClr val="1A1440"/>
+                </a:solidFill>
+                <a:latin typeface="Calibri"/>
+              </a:rPr>
+              <a:t> A slide that opens on its evidence makes the reader guess the point, and a caveat hidden in the appendix hands the person it affects a reason to call the slide dishonest.</a:t>
+            </a:r>
+          </a:p>
+        </p:txBody>
+      </p:sp>
+      <p:sp>
+        <p:nvSpPr>
+          <p:cNvPr id="11" name="Oval 10"/>
           <p:cNvSpPr/>
           <p:nvPr/>
         </p:nvSpPr>
         <p:spPr>
           <a:xfrm>
-            <a:off x="530352" y="3908945"/>
-            <a:ext cx="11130991" cy="1074420"/>
-          </a:xfrm>
-          <a:prstGeom prst="roundRect">
-            <a:avLst>
-              <a:gd name="adj" fmla="val 8000"/>
-            </a:avLst>
-          </a:prstGeom>
-          <a:solidFill>
-            <a:srgbClr val="F7F5FD"/>
-          </a:solidFill>
-          <a:ln w="9525">
-            <a:solidFill>
-              <a:srgbClr val="E4E1F1"/>
-            </a:solidFill>
-          </a:ln>
-          <a:effectLst/>
-        </p:spPr>
-        <p:style>
-          <a:lnRef idx="1">
-            <a:schemeClr val="accent1"/>
-          </a:lnRef>
-          <a:fillRef idx="3">
-            <a:schemeClr val="accent1"/>
-          </a:fillRef>
-          <a:effectRef idx="2">
-            <a:schemeClr val="accent1"/>
-          </a:effectRef>
-          <a:fontRef idx="minor">
-            <a:schemeClr val="lt1"/>
-          </a:fontRef>
-        </p:style>
-        <p:txBody>
-          <a:bodyPr rtlCol="0" anchor="ctr" wrap="square"/>
-          <a:lstStyle/>
-          <a:p>
-            <a:pPr algn="ctr"/>
-          </a:p>
-        </p:txBody>
-      </p:sp>
-      <p:sp>
-        <p:nvSpPr>
-          <p:cNvPr id="11" name="Rounded Rectangle 10"/>
-          <p:cNvSpPr/>
-          <p:nvPr/>
-        </p:nvSpPr>
-        <p:spPr>
-          <a:xfrm>
-            <a:off x="676656" y="4036961"/>
-            <a:ext cx="45720" cy="818388"/>
-          </a:xfrm>
-          <a:prstGeom prst="roundRect">
-            <a:avLst>
-              <a:gd name="adj" fmla="val 50000"/>
-            </a:avLst>
+            <a:off x="530352" y="6492240"/>
+            <a:ext cx="64008" cy="64008"/>
+          </a:xfrm>
+          <a:prstGeom prst="ellipse">
+            <a:avLst/>
           </a:prstGeom>
           <a:solidFill>
             <a:srgbClr val="5B3FD6"/>
@@ -35677,93 +35690,6 @@
         </p:nvSpPr>
         <p:spPr>
           <a:xfrm>
-            <a:off x="877824" y="4027817"/>
-            <a:ext cx="10564063" cy="891540"/>
-          </a:xfrm>
-          <a:prstGeom prst="rect">
-            <a:avLst/>
-          </a:prstGeom>
-          <a:noFill/>
-        </p:spPr>
-        <p:txBody>
-          <a:bodyPr wrap="square" anchor="ctr" lIns="0" rIns="0" tIns="0" bIns="0">
-            <a:spAutoFit/>
-          </a:bodyPr>
-          <a:lstStyle/>
-          <a:p>
-            <a:r>
-              <a:rPr sz="1500" b="1">
-                <a:solidFill>
-                  <a:srgbClr val="5B3FD6"/>
-                </a:solidFill>
-                <a:latin typeface="Calibri"/>
-              </a:rPr>
-              <a:t>The order is the point. </a:t>
-            </a:r>
-            <a:r>
-              <a:rPr sz="1500" b="0" i="0">
-                <a:solidFill>
-                  <a:srgbClr val="1A1440"/>
-                </a:solidFill>
-                <a:latin typeface="Calibri"/>
-              </a:rPr>
-              <a:t>Put the claim first: a slide that opens on its evidence makes the reader guess the point, and a caveat hidden in the appendix hands the person it affects a reason to call the slide dishonest.</a:t>
-            </a:r>
-          </a:p>
-        </p:txBody>
-      </p:sp>
-      <p:sp>
-        <p:nvSpPr>
-          <p:cNvPr id="13" name="Oval 12"/>
-          <p:cNvSpPr/>
-          <p:nvPr/>
-        </p:nvSpPr>
-        <p:spPr>
-          <a:xfrm>
-            <a:off x="530352" y="6492240"/>
-            <a:ext cx="64008" cy="64008"/>
-          </a:xfrm>
-          <a:prstGeom prst="ellipse">
-            <a:avLst/>
-          </a:prstGeom>
-          <a:solidFill>
-            <a:srgbClr val="5B3FD6"/>
-          </a:solidFill>
-          <a:ln>
-            <a:noFill/>
-          </a:ln>
-          <a:effectLst/>
-        </p:spPr>
-        <p:style>
-          <a:lnRef idx="1">
-            <a:schemeClr val="accent1"/>
-          </a:lnRef>
-          <a:fillRef idx="3">
-            <a:schemeClr val="accent1"/>
-          </a:fillRef>
-          <a:effectRef idx="2">
-            <a:schemeClr val="accent1"/>
-          </a:effectRef>
-          <a:fontRef idx="minor">
-            <a:schemeClr val="lt1"/>
-          </a:fontRef>
-        </p:style>
-        <p:txBody>
-          <a:bodyPr rtlCol="0" anchor="ctr" wrap="square"/>
-          <a:lstStyle/>
-          <a:p>
-            <a:pPr algn="ctr"/>
-          </a:p>
-        </p:txBody>
-      </p:sp>
-      <p:sp>
-        <p:nvSpPr>
-          <p:cNvPr id="14" name="TextBox 13"/>
-          <p:cNvSpPr txBox="1"/>
-          <p:nvPr/>
-        </p:nvSpPr>
-        <p:spPr>
-          <a:xfrm>
             <a:off x="640080" y="6437376"/>
             <a:ext cx="1286446" cy="152146"/>
           </a:xfrm>
@@ -35793,7 +35719,7 @@
       </p:sp>
       <p:sp>
         <p:nvSpPr>
-          <p:cNvPr id="15" name="Oval 14"/>
+          <p:cNvPr id="13" name="Oval 12"/>
           <p:cNvSpPr/>
           <p:nvPr/>
         </p:nvSpPr>
@@ -35837,7 +35763,7 @@
       </p:sp>
       <p:sp>
         <p:nvSpPr>
-          <p:cNvPr id="16" name="TextBox 15"/>
+          <p:cNvPr id="14" name="TextBox 13"/>
           <p:cNvSpPr txBox="1"/>
           <p:nvPr/>
         </p:nvSpPr>
@@ -35872,7 +35798,7 @@
       </p:sp>
       <p:sp>
         <p:nvSpPr>
-          <p:cNvPr id="17" name="Oval 16"/>
+          <p:cNvPr id="15" name="Oval 14"/>
           <p:cNvSpPr/>
           <p:nvPr/>
         </p:nvSpPr>
@@ -35916,7 +35842,7 @@
       </p:sp>
       <p:sp>
         <p:nvSpPr>
-          <p:cNvPr id="18" name="TextBox 17"/>
+          <p:cNvPr id="16" name="TextBox 15"/>
           <p:cNvSpPr txBox="1"/>
           <p:nvPr/>
         </p:nvSpPr>
@@ -35951,7 +35877,7 @@
       </p:sp>
       <p:sp>
         <p:nvSpPr>
-          <p:cNvPr id="19" name="TextBox 18"/>
+          <p:cNvPr id="17" name="TextBox 16"/>
           <p:cNvSpPr txBox="1"/>
           <p:nvPr/>
         </p:nvSpPr>
